--- a/OWASP_Distroless_Containers_Presentation-chatgpt.pptx
+++ b/OWASP_Distroless_Containers_Presentation-chatgpt.pptx
@@ -2892,7 +2892,7 @@
           <a:p>
             <a:fld id="{5BCAD085-E8A6-8845-BD4E-CB4CCA059FC4}" type="datetimeFigureOut">
               <a:rPr lang="en-US" smtClean="0"/>
-              <a:t>6/4/26</a:t>
+              <a:t>6/17/26</a:t>
             </a:fld>
             <a:endParaRPr lang="en-US"/>
           </a:p>
@@ -3060,7 +3060,7 @@
           <a:p>
             <a:fld id="{5BCAD085-E8A6-8845-BD4E-CB4CCA059FC4}" type="datetimeFigureOut">
               <a:rPr lang="en-US" smtClean="0"/>
-              <a:t>6/4/26</a:t>
+              <a:t>6/17/26</a:t>
             </a:fld>
             <a:endParaRPr lang="en-US"/>
           </a:p>
@@ -3238,7 +3238,7 @@
           <a:p>
             <a:fld id="{5BCAD085-E8A6-8845-BD4E-CB4CCA059FC4}" type="datetimeFigureOut">
               <a:rPr lang="en-US" smtClean="0"/>
-              <a:t>6/4/26</a:t>
+              <a:t>6/17/26</a:t>
             </a:fld>
             <a:endParaRPr lang="en-US"/>
           </a:p>
@@ -3406,7 +3406,7 @@
           <a:p>
             <a:fld id="{5BCAD085-E8A6-8845-BD4E-CB4CCA059FC4}" type="datetimeFigureOut">
               <a:rPr lang="en-US" smtClean="0"/>
-              <a:t>6/4/26</a:t>
+              <a:t>6/17/26</a:t>
             </a:fld>
             <a:endParaRPr lang="en-US"/>
           </a:p>
@@ -3651,7 +3651,7 @@
           <a:p>
             <a:fld id="{5BCAD085-E8A6-8845-BD4E-CB4CCA059FC4}" type="datetimeFigureOut">
               <a:rPr lang="en-US" smtClean="0"/>
-              <a:t>6/4/26</a:t>
+              <a:t>6/17/26</a:t>
             </a:fld>
             <a:endParaRPr lang="en-US"/>
           </a:p>
@@ -3936,7 +3936,7 @@
           <a:p>
             <a:fld id="{5BCAD085-E8A6-8845-BD4E-CB4CCA059FC4}" type="datetimeFigureOut">
               <a:rPr lang="en-US" smtClean="0"/>
-              <a:t>6/4/26</a:t>
+              <a:t>6/17/26</a:t>
             </a:fld>
             <a:endParaRPr lang="en-US"/>
           </a:p>
@@ -4355,7 +4355,7 @@
           <a:p>
             <a:fld id="{5BCAD085-E8A6-8845-BD4E-CB4CCA059FC4}" type="datetimeFigureOut">
               <a:rPr lang="en-US" smtClean="0"/>
-              <a:t>6/4/26</a:t>
+              <a:t>6/17/26</a:t>
             </a:fld>
             <a:endParaRPr lang="en-US"/>
           </a:p>
@@ -4472,7 +4472,7 @@
           <a:p>
             <a:fld id="{5BCAD085-E8A6-8845-BD4E-CB4CCA059FC4}" type="datetimeFigureOut">
               <a:rPr lang="en-US" smtClean="0"/>
-              <a:t>6/4/26</a:t>
+              <a:t>6/17/26</a:t>
             </a:fld>
             <a:endParaRPr lang="en-US"/>
           </a:p>
@@ -4567,7 +4567,7 @@
           <a:p>
             <a:fld id="{5BCAD085-E8A6-8845-BD4E-CB4CCA059FC4}" type="datetimeFigureOut">
               <a:rPr lang="en-US" smtClean="0"/>
-              <a:t>6/4/26</a:t>
+              <a:t>6/17/26</a:t>
             </a:fld>
             <a:endParaRPr lang="en-US"/>
           </a:p>
@@ -4842,7 +4842,7 @@
           <a:p>
             <a:fld id="{5BCAD085-E8A6-8845-BD4E-CB4CCA059FC4}" type="datetimeFigureOut">
               <a:rPr lang="en-US" smtClean="0"/>
-              <a:t>6/4/26</a:t>
+              <a:t>6/17/26</a:t>
             </a:fld>
             <a:endParaRPr lang="en-US"/>
           </a:p>
@@ -5094,7 +5094,7 @@
           <a:p>
             <a:fld id="{5BCAD085-E8A6-8845-BD4E-CB4CCA059FC4}" type="datetimeFigureOut">
               <a:rPr lang="en-US" smtClean="0"/>
-              <a:t>6/4/26</a:t>
+              <a:t>6/17/26</a:t>
             </a:fld>
             <a:endParaRPr lang="en-US"/>
           </a:p>
@@ -5305,7 +5305,7 @@
           <a:p>
             <a:fld id="{5BCAD085-E8A6-8845-BD4E-CB4CCA059FC4}" type="datetimeFigureOut">
               <a:rPr lang="en-US" smtClean="0"/>
-              <a:t>6/4/26</a:t>
+              <a:t>6/17/26</a:t>
             </a:fld>
             <a:endParaRPr lang="en-US"/>
           </a:p>
@@ -5714,6 +5714,14 @@
 <file path=ppt/slides/slide1.xml><?xml version="1.0" encoding="utf-8"?>
 <p:sld xmlns:a="http://schemas.openxmlformats.org/drawingml/2006/main" xmlns:r="http://schemas.openxmlformats.org/officeDocument/2006/relationships" xmlns:p="http://schemas.openxmlformats.org/presentationml/2006/main">
   <p:cSld>
+    <p:bg>
+      <p:bgPr>
+        <a:solidFill>
+          <a:srgbClr val="1E2A3A"/>
+        </a:solidFill>
+        <a:effectLst/>
+      </p:bgPr>
+    </p:bg>
     <p:spTree>
       <p:nvGrpSpPr>
         <p:cNvPr id="1" name=""/>
@@ -5744,6 +5752,11 @@
           <a:lstStyle/>
           <a:p>
             <a:r>
+              <a:rPr sz="3600" b="1">
+                <a:solidFill>
+                  <a:srgbClr val="FFFFFF"/>
+                </a:solidFill>
+              </a:rPr>
               <a:t>Distroless Containers: Less OS, Less Risk</a:t>
             </a:r>
           </a:p>
@@ -5765,13 +5778,69 @@
           <a:lstStyle/>
           <a:p>
             <a:r>
+              <a:rPr sz="3600" b="1">
+                <a:solidFill>
+                  <a:srgbClr val="FFFFFF"/>
+                </a:solidFill>
+              </a:rPr>
               <a:t>OWASP Tampa Chapter</a:t>
             </a:r>
           </a:p>
           <a:p>
             <a:r>
+              <a:rPr sz="3600" b="1">
+                <a:solidFill>
+                  <a:srgbClr val="FFFFFF"/>
+                </a:solidFill>
+              </a:rPr>
               <a:t>Practical container hardening with distroless, Wolfi, and Chainguard</a:t>
             </a:r>
+          </a:p>
+        </p:txBody>
+      </p:sp>
+      <p:sp>
+        <p:nvSpPr>
+          <p:cNvPr id="4" name="Rectangle 3"/>
+          <p:cNvSpPr/>
+          <p:nvPr/>
+        </p:nvSpPr>
+        <p:spPr>
+          <a:xfrm>
+            <a:off x="1234440" y="5074920"/>
+            <a:ext cx="6675120" cy="60000"/>
+          </a:xfrm>
+          <a:prstGeom prst="rect">
+            <a:avLst/>
+          </a:prstGeom>
+          <a:solidFill>
+            <a:srgbClr val="00BCEB"/>
+          </a:solidFill>
+          <a:ln>
+            <a:solidFill>
+              <a:srgbClr val="1E2A3A"/>
+            </a:solidFill>
+          </a:ln>
+        </p:spPr>
+        <p:style>
+          <a:lnRef idx="1">
+            <a:schemeClr val="accent1"/>
+          </a:lnRef>
+          <a:fillRef idx="3">
+            <a:schemeClr val="accent1"/>
+          </a:fillRef>
+          <a:effectRef idx="2">
+            <a:schemeClr val="accent1"/>
+          </a:effectRef>
+          <a:fontRef idx="minor">
+            <a:schemeClr val="lt1"/>
+          </a:fontRef>
+        </p:style>
+        <p:txBody>
+          <a:bodyPr rtlCol="0" anchor="ctr"/>
+          <a:lstStyle/>
+          <a:p>
+            <a:pPr algn="ctr"/>
+            <a:endParaRPr/>
           </a:p>
         </p:txBody>
       </p:sp>
@@ -5786,6 +5855,14 @@
 <file path=ppt/slides/slide10.xml><?xml version="1.0" encoding="utf-8"?>
 <p:sld xmlns:a="http://schemas.openxmlformats.org/drawingml/2006/main" xmlns:r="http://schemas.openxmlformats.org/officeDocument/2006/relationships" xmlns:p="http://schemas.openxmlformats.org/presentationml/2006/main">
   <p:cSld>
+    <p:bg>
+      <p:bgPr>
+        <a:solidFill>
+          <a:srgbClr val="1E2A3A"/>
+        </a:solidFill>
+        <a:effectLst/>
+      </p:bgPr>
+    </p:bg>
     <p:spTree>
       <p:nvGrpSpPr>
         <p:cNvPr id="1" name=""/>
@@ -5816,6 +5893,11 @@
           <a:lstStyle/>
           <a:p>
             <a:r>
+              <a:rPr sz="2800" b="1">
+                <a:solidFill>
+                  <a:srgbClr val="FFFFFF"/>
+                </a:solidFill>
+              </a:rPr>
               <a:t>Scratch Images and Static Binaries</a:t>
             </a:r>
           </a:p>
@@ -5839,84 +5921,152 @@
           <a:lstStyle/>
           <a:p>
             <a:r>
-              <a:rPr lang="en-US" dirty="0"/>
+              <a:rPr lang="en-US" sz="1600" dirty="0">
+                <a:solidFill>
+                  <a:srgbClr val="D0D8E0"/>
+                </a:solidFill>
+              </a:rPr>
               <a:t>Extremely small attack surface.</a:t>
             </a:r>
           </a:p>
           <a:p>
             <a:r>
-              <a:rPr lang="en-US" dirty="0"/>
+              <a:rPr lang="en-US" sz="1600" dirty="0">
+                <a:solidFill>
+                  <a:srgbClr val="D0D8E0"/>
+                </a:solidFill>
+              </a:rPr>
               <a:t>“</a:t>
             </a:r>
             <a:r>
-              <a:rPr dirty="0"/>
+              <a:rPr sz="1600" dirty="0">
+                <a:solidFill>
+                  <a:srgbClr val="D0D8E0"/>
+                </a:solidFill>
+              </a:rPr>
               <a:t>FROM scratch</a:t>
             </a:r>
             <a:r>
-              <a:rPr lang="en-US" dirty="0"/>
+              <a:rPr lang="en-US" sz="1600" dirty="0">
+                <a:solidFill>
+                  <a:srgbClr val="D0D8E0"/>
+                </a:solidFill>
+              </a:rPr>
               <a:t>"</a:t>
             </a:r>
             <a:r>
-              <a:rPr dirty="0"/>
+              <a:rPr sz="1600" dirty="0">
+                <a:solidFill>
+                  <a:srgbClr val="D0D8E0"/>
+                </a:solidFill>
+              </a:rPr>
               <a:t> creates nearly empty images.</a:t>
             </a:r>
             <a:endParaRPr lang="en-US" dirty="0"/>
           </a:p>
           <a:p>
             <a:r>
-              <a:rPr lang="en-US" dirty="0"/>
+              <a:rPr lang="en-US" sz="1600" dirty="0">
+                <a:solidFill>
+                  <a:srgbClr val="D0D8E0"/>
+                </a:solidFill>
+              </a:rPr>
               <a:t>Need create /</a:t>
             </a:r>
             <a:r>
-              <a:rPr lang="en-US" dirty="0" err="1"/>
+              <a:rPr lang="en-US" sz="1600" dirty="0" err="1">
+                <a:solidFill>
+                  <a:srgbClr val="D0D8E0"/>
+                </a:solidFill>
+              </a:rPr>
               <a:t>etc</a:t>
             </a:r>
             <a:r>
-              <a:rPr lang="en-US" dirty="0"/>
+              <a:rPr lang="en-US" sz="1600" dirty="0">
+                <a:solidFill>
+                  <a:srgbClr val="D0D8E0"/>
+                </a:solidFill>
+              </a:rPr>
               <a:t>/passwd and then copy over for user mapping</a:t>
             </a:r>
             <a:endParaRPr dirty="0"/>
           </a:p>
           <a:p>
             <a:r>
-              <a:rPr dirty="0"/>
+              <a:rPr sz="1600" dirty="0">
+                <a:solidFill>
+                  <a:srgbClr val="D0D8E0"/>
+                </a:solidFill>
+              </a:rPr>
               <a:t>Static binaries are </a:t>
             </a:r>
             <a:r>
-              <a:rPr lang="en-US" dirty="0"/>
+              <a:rPr lang="en-US" sz="1600" dirty="0">
+                <a:solidFill>
+                  <a:srgbClr val="D0D8E0"/>
+                </a:solidFill>
+              </a:rPr>
               <a:t>easy.  </a:t>
             </a:r>
           </a:p>
           <a:p>
             <a:r>
-              <a:rPr lang="en-US" dirty="0"/>
+              <a:rPr lang="en-US" sz="1600" dirty="0">
+                <a:solidFill>
+                  <a:srgbClr val="D0D8E0"/>
+                </a:solidFill>
+              </a:rPr>
               <a:t>Dynamic binaries</a:t>
             </a:r>
             <a:r>
-              <a:rPr dirty="0"/>
+              <a:rPr sz="1600" dirty="0">
+                <a:solidFill>
+                  <a:srgbClr val="D0D8E0"/>
+                </a:solidFill>
+              </a:rPr>
               <a:t> requir</a:t>
             </a:r>
             <a:r>
-              <a:rPr lang="en-US" dirty="0"/>
+              <a:rPr lang="en-US" sz="1600" dirty="0">
+                <a:solidFill>
+                  <a:srgbClr val="D0D8E0"/>
+                </a:solidFill>
+              </a:rPr>
               <a:t>e a lot more work.</a:t>
             </a:r>
           </a:p>
           <a:p>
             <a:pPr lvl="1"/>
             <a:r>
-              <a:rPr lang="en-US" dirty="0"/>
+              <a:rPr lang="en-US" sz="1600" dirty="0">
+                <a:solidFill>
+                  <a:srgbClr val="D0D8E0"/>
+                </a:solidFill>
+              </a:rPr>
               <a:t>Missing </a:t>
             </a:r>
             <a:r>
-              <a:rPr lang="en-US" dirty="0" err="1"/>
+              <a:rPr lang="en-US" sz="1600" dirty="0" err="1">
+                <a:solidFill>
+                  <a:srgbClr val="D0D8E0"/>
+                </a:solidFill>
+              </a:rPr>
               <a:t>libc</a:t>
             </a:r>
             <a:r>
-              <a:rPr lang="en-US" dirty="0"/>
+              <a:rPr lang="en-US" sz="1600" dirty="0">
+                <a:solidFill>
+                  <a:srgbClr val="D0D8E0"/>
+                </a:solidFill>
+              </a:rPr>
               <a:t>/</a:t>
             </a:r>
             <a:r>
-              <a:rPr lang="en-US" dirty="0" err="1"/>
+              <a:rPr lang="en-US" sz="1600" dirty="0" err="1">
+                <a:solidFill>
+                  <a:srgbClr val="D0D8E0"/>
+                </a:solidFill>
+              </a:rPr>
               <a:t>glibc</a:t>
             </a:r>
             <a:endParaRPr lang="en-US" dirty="0"/>
@@ -5924,14 +6074,22 @@
           <a:p>
             <a:pPr lvl="1"/>
             <a:r>
-              <a:rPr lang="en-US" dirty="0"/>
+              <a:rPr lang="en-US" sz="1600" dirty="0">
+                <a:solidFill>
+                  <a:srgbClr val="D0D8E0"/>
+                </a:solidFill>
+              </a:rPr>
               <a:t>Missing runtime loaders</a:t>
             </a:r>
           </a:p>
           <a:p>
             <a:pPr lvl="1"/>
             <a:r>
-              <a:rPr lang="en-US" dirty="0"/>
+              <a:rPr lang="en-US" sz="1600" dirty="0">
+                <a:solidFill>
+                  <a:srgbClr val="D0D8E0"/>
+                </a:solidFill>
+              </a:rPr>
               <a:t>Shared library dependencies are absent</a:t>
             </a:r>
             <a:endParaRPr dirty="0"/>
@@ -5968,8 +6126,59 @@
               </a:defRPr>
             </a:pPr>
             <a:r>
+              <a:rPr sz="1000" i="1">
+                <a:solidFill>
+                  <a:srgbClr val="607890"/>
+                </a:solidFill>
+              </a:rPr>
               <a:t>Additional implementation details, Dockerfiles, scripts, and speaker notes will be available in the GitHub repository.</a:t>
             </a:r>
+          </a:p>
+        </p:txBody>
+      </p:sp>
+      <p:sp>
+        <p:nvSpPr>
+          <p:cNvPr id="5" name="Rectangle 4"/>
+          <p:cNvSpPr/>
+          <p:nvPr/>
+        </p:nvSpPr>
+        <p:spPr>
+          <a:xfrm>
+            <a:off x="411480" y="1261872"/>
+            <a:ext cx="8321040" cy="40000"/>
+          </a:xfrm>
+          <a:prstGeom prst="rect">
+            <a:avLst/>
+          </a:prstGeom>
+          <a:solidFill>
+            <a:srgbClr val="00BCEB"/>
+          </a:solidFill>
+          <a:ln>
+            <a:solidFill>
+              <a:srgbClr val="1E2A3A"/>
+            </a:solidFill>
+          </a:ln>
+        </p:spPr>
+        <p:style>
+          <a:lnRef idx="1">
+            <a:schemeClr val="accent1"/>
+          </a:lnRef>
+          <a:fillRef idx="3">
+            <a:schemeClr val="accent1"/>
+          </a:fillRef>
+          <a:effectRef idx="2">
+            <a:schemeClr val="accent1"/>
+          </a:effectRef>
+          <a:fontRef idx="minor">
+            <a:schemeClr val="lt1"/>
+          </a:fontRef>
+        </p:style>
+        <p:txBody>
+          <a:bodyPr rtlCol="0" anchor="ctr"/>
+          <a:lstStyle/>
+          <a:p>
+            <a:pPr algn="ctr"/>
+            <a:endParaRPr/>
           </a:p>
         </p:txBody>
       </p:sp>
@@ -5984,6 +6193,14 @@
 <file path=ppt/slides/slide11.xml><?xml version="1.0" encoding="utf-8"?>
 <p:sld xmlns:a="http://schemas.openxmlformats.org/drawingml/2006/main" xmlns:r="http://schemas.openxmlformats.org/officeDocument/2006/relationships" xmlns:p="http://schemas.openxmlformats.org/presentationml/2006/main">
   <p:cSld>
+    <p:bg>
+      <p:bgPr>
+        <a:solidFill>
+          <a:srgbClr val="1E2A3A"/>
+        </a:solidFill>
+        <a:effectLst/>
+      </p:bgPr>
+    </p:bg>
     <p:spTree>
       <p:nvGrpSpPr>
         <p:cNvPr id="1" name=""/>
@@ -6000,6 +6217,190 @@
       </p:grpSpPr>
       <p:sp>
         <p:nvSpPr>
+          <p:cNvPr id="9" name="Rectangle 8"/>
+          <p:cNvSpPr/>
+          <p:nvPr/>
+        </p:nvSpPr>
+        <p:spPr>
+          <a:xfrm>
+            <a:off x="406400" y="4394200"/>
+            <a:ext cx="8331200" cy="355600"/>
+          </a:xfrm>
+          <a:prstGeom prst="rect">
+            <a:avLst/>
+          </a:prstGeom>
+          <a:solidFill>
+            <a:srgbClr val="0A1420"/>
+          </a:solidFill>
+          <a:ln>
+            <a:solidFill>
+              <a:srgbClr val="1E2A3A"/>
+            </a:solidFill>
+          </a:ln>
+        </p:spPr>
+        <p:style>
+          <a:lnRef idx="1">
+            <a:schemeClr val="accent1"/>
+          </a:lnRef>
+          <a:fillRef idx="3">
+            <a:schemeClr val="accent1"/>
+          </a:fillRef>
+          <a:effectRef idx="2">
+            <a:schemeClr val="accent1"/>
+          </a:effectRef>
+          <a:fontRef idx="minor">
+            <a:schemeClr val="lt1"/>
+          </a:fontRef>
+        </p:style>
+        <p:txBody>
+          <a:bodyPr rtlCol="0" anchor="ctr"/>
+          <a:lstStyle/>
+          <a:p>
+            <a:pPr algn="ctr"/>
+            <a:endParaRPr/>
+          </a:p>
+        </p:txBody>
+      </p:sp>
+      <p:sp>
+        <p:nvSpPr>
+          <p:cNvPr id="8" name="Rectangle 7"/>
+          <p:cNvSpPr/>
+          <p:nvPr/>
+        </p:nvSpPr>
+        <p:spPr>
+          <a:xfrm>
+            <a:off x="406400" y="3632200"/>
+            <a:ext cx="8331200" cy="609600"/>
+          </a:xfrm>
+          <a:prstGeom prst="rect">
+            <a:avLst/>
+          </a:prstGeom>
+          <a:solidFill>
+            <a:srgbClr val="0A1420"/>
+          </a:solidFill>
+          <a:ln>
+            <a:solidFill>
+              <a:srgbClr val="1E2A3A"/>
+            </a:solidFill>
+          </a:ln>
+        </p:spPr>
+        <p:style>
+          <a:lnRef idx="1">
+            <a:schemeClr val="accent1"/>
+          </a:lnRef>
+          <a:fillRef idx="3">
+            <a:schemeClr val="accent1"/>
+          </a:fillRef>
+          <a:effectRef idx="2">
+            <a:schemeClr val="accent1"/>
+          </a:effectRef>
+          <a:fontRef idx="minor">
+            <a:schemeClr val="lt1"/>
+          </a:fontRef>
+        </p:style>
+        <p:txBody>
+          <a:bodyPr rtlCol="0" anchor="ctr"/>
+          <a:lstStyle/>
+          <a:p>
+            <a:pPr algn="ctr"/>
+            <a:endParaRPr/>
+          </a:p>
+        </p:txBody>
+      </p:sp>
+      <p:sp>
+        <p:nvSpPr>
+          <p:cNvPr id="7" name="Rectangle 6"/>
+          <p:cNvSpPr/>
+          <p:nvPr/>
+        </p:nvSpPr>
+        <p:spPr>
+          <a:xfrm>
+            <a:off x="406400" y="2870200"/>
+            <a:ext cx="8331200" cy="609600"/>
+          </a:xfrm>
+          <a:prstGeom prst="rect">
+            <a:avLst/>
+          </a:prstGeom>
+          <a:solidFill>
+            <a:srgbClr val="0A1420"/>
+          </a:solidFill>
+          <a:ln>
+            <a:solidFill>
+              <a:srgbClr val="1E2A3A"/>
+            </a:solidFill>
+          </a:ln>
+        </p:spPr>
+        <p:style>
+          <a:lnRef idx="1">
+            <a:schemeClr val="accent1"/>
+          </a:lnRef>
+          <a:fillRef idx="3">
+            <a:schemeClr val="accent1"/>
+          </a:fillRef>
+          <a:effectRef idx="2">
+            <a:schemeClr val="accent1"/>
+          </a:effectRef>
+          <a:fontRef idx="minor">
+            <a:schemeClr val="lt1"/>
+          </a:fontRef>
+        </p:style>
+        <p:txBody>
+          <a:bodyPr rtlCol="0" anchor="ctr"/>
+          <a:lstStyle/>
+          <a:p>
+            <a:pPr algn="ctr"/>
+            <a:endParaRPr/>
+          </a:p>
+        </p:txBody>
+      </p:sp>
+      <p:sp>
+        <p:nvSpPr>
+          <p:cNvPr id="6" name="Rectangle 5"/>
+          <p:cNvSpPr/>
+          <p:nvPr/>
+        </p:nvSpPr>
+        <p:spPr>
+          <a:xfrm>
+            <a:off x="406400" y="2108200"/>
+            <a:ext cx="8331200" cy="609600"/>
+          </a:xfrm>
+          <a:prstGeom prst="rect">
+            <a:avLst/>
+          </a:prstGeom>
+          <a:solidFill>
+            <a:srgbClr val="0A1420"/>
+          </a:solidFill>
+          <a:ln>
+            <a:solidFill>
+              <a:srgbClr val="1E2A3A"/>
+            </a:solidFill>
+          </a:ln>
+        </p:spPr>
+        <p:style>
+          <a:lnRef idx="1">
+            <a:schemeClr val="accent1"/>
+          </a:lnRef>
+          <a:fillRef idx="3">
+            <a:schemeClr val="accent1"/>
+          </a:fillRef>
+          <a:effectRef idx="2">
+            <a:schemeClr val="accent1"/>
+          </a:effectRef>
+          <a:fontRef idx="minor">
+            <a:schemeClr val="lt1"/>
+          </a:fontRef>
+        </p:style>
+        <p:txBody>
+          <a:bodyPr rtlCol="0" anchor="ctr"/>
+          <a:lstStyle/>
+          <a:p>
+            <a:pPr algn="ctr"/>
+            <a:endParaRPr/>
+          </a:p>
+        </p:txBody>
+      </p:sp>
+      <p:sp>
+        <p:nvSpPr>
           <p:cNvPr id="2" name="Title 1"/>
           <p:cNvSpPr>
             <a:spLocks noGrp="1"/>
@@ -6014,19 +6415,35 @@
           <a:lstStyle/>
           <a:p>
             <a:r>
-              <a:rPr dirty="0"/>
+              <a:rPr sz="2800" b="1" dirty="0">
+                <a:solidFill>
+                  <a:srgbClr val="FFFFFF"/>
+                </a:solidFill>
+              </a:rPr>
               <a:t>Demo: Static </a:t>
             </a:r>
             <a:r>
-              <a:rPr lang="en-US" dirty="0"/>
+              <a:rPr lang="en-US" sz="2800" b="1" dirty="0">
+                <a:solidFill>
+                  <a:srgbClr val="FFFFFF"/>
+                </a:solidFill>
+              </a:rPr>
               <a:t>with </a:t>
             </a:r>
             <a:r>
-              <a:rPr dirty="0"/>
+              <a:rPr sz="2800" b="1" dirty="0">
+                <a:solidFill>
+                  <a:srgbClr val="FFFFFF"/>
+                </a:solidFill>
+              </a:rPr>
               <a:t>Go </a:t>
             </a:r>
             <a:r>
-              <a:rPr lang="en-US" dirty="0"/>
+              <a:rPr lang="en-US" sz="2800" b="1" dirty="0">
+                <a:solidFill>
+                  <a:srgbClr val="FFFFFF"/>
+                </a:solidFill>
+              </a:rPr>
               <a:t>App</a:t>
             </a:r>
             <a:endParaRPr dirty="0"/>
@@ -6051,97 +6468,164 @@
           <a:lstStyle/>
           <a:p>
             <a:r>
-              <a:rPr lang="en-US" b="1" dirty="0"/>
+              <a:rPr lang="en-US" sz="1600" b="1" dirty="0">
+                <a:solidFill>
+                  <a:srgbClr val="F7A800"/>
+                </a:solidFill>
+              </a:rPr>
               <a:t>06-demo-scratch-go  --  CGO_ENABLED=0, single static binary, FROM scratch</a:t>
             </a:r>
           </a:p>
           <a:p>
             <a:r>
-              <a:rPr lang="en-US" b="1" dirty="0"/>
+              <a:rPr lang="en-US" sz="1600" b="1" dirty="0">
+                <a:solidFill>
+                  <a:srgbClr val="F7A800"/>
+                </a:solidFill>
+              </a:rPr>
               <a:t>Build and run:</a:t>
             </a:r>
           </a:p>
           <a:p>
             <a:pPr lvl="1"/>
             <a:r>
-              <a:rPr lang="en-US" dirty="0"/>
+              <a:rPr lang="en-US" sz="1300" b="0" dirty="0">
+                <a:solidFill>
+                  <a:srgbClr val="A8D8FF"/>
+                </a:solidFill>
+                <a:latin typeface="Courier New"/>
+              </a:rPr>
               <a:t>docker build -f Dockerfile -t 06-demo-scratch-go .</a:t>
             </a:r>
           </a:p>
           <a:p>
             <a:pPr lvl="1"/>
             <a:r>
-              <a:rPr lang="en-US" dirty="0"/>
+              <a:rPr lang="en-US" sz="1300" b="0" dirty="0">
+                <a:solidFill>
+                  <a:srgbClr val="A8D8FF"/>
+                </a:solidFill>
+                <a:latin typeface="Courier New"/>
+              </a:rPr>
               <a:t>docker run -d --name 06-demo-scratch-go -p 5006:5000 06-demo-scratch-go</a:t>
             </a:r>
           </a:p>
           <a:p>
             <a:r>
-              <a:rPr lang="en-US" b="1" dirty="0"/>
+              <a:rPr lang="en-US" sz="1600" b="1" dirty="0">
+                <a:solidFill>
+                  <a:srgbClr val="F7A800"/>
+                </a:solidFill>
+              </a:rPr>
               <a:t>Normal request:</a:t>
             </a:r>
           </a:p>
           <a:p>
             <a:pPr lvl="1"/>
             <a:r>
-              <a:rPr lang="en-US" dirty="0"/>
+              <a:rPr lang="en-US" sz="1300" b="0" dirty="0">
+                <a:solidFill>
+                  <a:srgbClr val="A8D8FF"/>
+                </a:solidFill>
+                <a:latin typeface="Courier New"/>
+              </a:rPr>
               <a:t>curl "http://localhost:5006/ping?host=8.8.8.8"</a:t>
             </a:r>
           </a:p>
           <a:p>
             <a:pPr lvl="1"/>
             <a:r>
-              <a:rPr lang="en-US" dirty="0"/>
+              <a:rPr lang="en-US" sz="1300" b="0" dirty="0">
+                <a:solidFill>
+                  <a:srgbClr val="A8D8FF"/>
+                </a:solidFill>
+                <a:latin typeface="Courier New"/>
+              </a:rPr>
               <a:t>{ "error": "fork/exec /bin/sh: no such file or directory" }</a:t>
             </a:r>
           </a:p>
           <a:p>
             <a:r>
-              <a:rPr lang="en-US" b="1" dirty="0"/>
+              <a:rPr lang="en-US" sz="1600" b="1" dirty="0">
+                <a:solidFill>
+                  <a:srgbClr val="F7A800"/>
+                </a:solidFill>
+              </a:rPr>
               <a:t>Exploit attempt:</a:t>
             </a:r>
           </a:p>
           <a:p>
             <a:pPr lvl="1"/>
             <a:r>
-              <a:rPr lang="en-US" dirty="0"/>
+              <a:rPr lang="en-US" sz="1300" b="0" dirty="0">
+                <a:solidFill>
+                  <a:srgbClr val="A8D8FF"/>
+                </a:solidFill>
+                <a:latin typeface="Courier New"/>
+              </a:rPr>
               <a:t>curl "http://localhost:5006/ping?host=8.8.8.8%3B+id"</a:t>
             </a:r>
           </a:p>
           <a:p>
             <a:pPr lvl="1"/>
             <a:r>
-              <a:rPr lang="en-US" dirty="0"/>
+              <a:rPr lang="en-US" sz="1300" b="0" dirty="0">
+                <a:solidFill>
+                  <a:srgbClr val="A8D8FF"/>
+                </a:solidFill>
+                <a:latin typeface="Courier New"/>
+              </a:rPr>
               <a:t>{ "error": "fork/exec /bin/sh: no such file or directory" }</a:t>
             </a:r>
           </a:p>
           <a:p>
             <a:r>
-              <a:rPr lang="en-US" b="1" dirty="0"/>
+              <a:rPr lang="en-US" sz="1600" b="1" dirty="0">
+                <a:solidFill>
+                  <a:srgbClr val="F7A800"/>
+                </a:solidFill>
+              </a:rPr>
               <a:t>Shell exec:</a:t>
             </a:r>
           </a:p>
           <a:p>
             <a:pPr lvl="1"/>
             <a:r>
-              <a:rPr lang="en-US" dirty="0"/>
+              <a:rPr lang="en-US" sz="1300" b="0" dirty="0">
+                <a:solidFill>
+                  <a:srgbClr val="A8D8FF"/>
+                </a:solidFill>
+                <a:latin typeface="Courier New"/>
+              </a:rPr>
               <a:t>docker exec 06-demo-scratch-go /bin/sh</a:t>
             </a:r>
           </a:p>
           <a:p>
             <a:pPr lvl="1"/>
             <a:r>
-              <a:rPr lang="en-US" dirty="0"/>
+              <a:rPr lang="en-US" sz="1600" dirty="0">
+                <a:solidFill>
+                  <a:srgbClr val="D0D8E0"/>
+                </a:solidFill>
+              </a:rPr>
               <a:t>OCI error: /bin/sh: no such file or directory</a:t>
             </a:r>
           </a:p>
           <a:p>
             <a:r>
-              <a:rPr lang="en-US" b="1" dirty="0"/>
+              <a:rPr lang="en-US" sz="1600" b="1" dirty="0">
+                <a:solidFill>
+                  <a:srgbClr val="F7A800"/>
+                </a:solidFill>
+              </a:rPr>
               <a:t>Image size:</a:t>
             </a:r>
             <a:r>
-              <a:rPr lang="en-US" dirty="0"/>
+              <a:rPr lang="en-US" sz="1600" dirty="0">
+                <a:solidFill>
+                  <a:srgbClr val="D0D8E0"/>
+                </a:solidFill>
+              </a:rPr>
               <a:t> 6.88 MB</a:t>
             </a:r>
           </a:p>
@@ -6177,8 +6661,59 @@
               </a:defRPr>
             </a:pPr>
             <a:r>
+              <a:rPr sz="1000" i="1">
+                <a:solidFill>
+                  <a:srgbClr val="607890"/>
+                </a:solidFill>
+              </a:rPr>
               <a:t>Additional implementation details, Dockerfiles, scripts, and speaker notes will be available in the GitHub repository.</a:t>
             </a:r>
+          </a:p>
+        </p:txBody>
+      </p:sp>
+      <p:sp>
+        <p:nvSpPr>
+          <p:cNvPr id="5" name="Rectangle 4"/>
+          <p:cNvSpPr/>
+          <p:nvPr/>
+        </p:nvSpPr>
+        <p:spPr>
+          <a:xfrm>
+            <a:off x="411480" y="1261872"/>
+            <a:ext cx="8321040" cy="40000"/>
+          </a:xfrm>
+          <a:prstGeom prst="rect">
+            <a:avLst/>
+          </a:prstGeom>
+          <a:solidFill>
+            <a:srgbClr val="00BCEB"/>
+          </a:solidFill>
+          <a:ln>
+            <a:solidFill>
+              <a:srgbClr val="1E2A3A"/>
+            </a:solidFill>
+          </a:ln>
+        </p:spPr>
+        <p:style>
+          <a:lnRef idx="1">
+            <a:schemeClr val="accent1"/>
+          </a:lnRef>
+          <a:fillRef idx="3">
+            <a:schemeClr val="accent1"/>
+          </a:fillRef>
+          <a:effectRef idx="2">
+            <a:schemeClr val="accent1"/>
+          </a:effectRef>
+          <a:fontRef idx="minor">
+            <a:schemeClr val="lt1"/>
+          </a:fontRef>
+        </p:style>
+        <p:txBody>
+          <a:bodyPr rtlCol="0" anchor="ctr"/>
+          <a:lstStyle/>
+          <a:p>
+            <a:pPr algn="ctr"/>
+            <a:endParaRPr/>
           </a:p>
         </p:txBody>
       </p:sp>
@@ -6193,6 +6728,14 @@
 <file path=ppt/slides/slide12.xml><?xml version="1.0" encoding="utf-8"?>
 <p:sld xmlns:a="http://schemas.openxmlformats.org/drawingml/2006/main" xmlns:r="http://schemas.openxmlformats.org/officeDocument/2006/relationships" xmlns:p="http://schemas.openxmlformats.org/presentationml/2006/main">
   <p:cSld>
+    <p:bg>
+      <p:bgPr>
+        <a:solidFill>
+          <a:srgbClr val="1E2A3A"/>
+        </a:solidFill>
+        <a:effectLst/>
+      </p:bgPr>
+    </p:bg>
     <p:spTree>
       <p:nvGrpSpPr>
         <p:cNvPr id="1" name=""/>
@@ -6209,6 +6752,190 @@
       </p:grpSpPr>
       <p:sp>
         <p:nvSpPr>
+          <p:cNvPr id="9" name="Rectangle 8"/>
+          <p:cNvSpPr/>
+          <p:nvPr/>
+        </p:nvSpPr>
+        <p:spPr>
+          <a:xfrm>
+            <a:off x="406400" y="4394200"/>
+            <a:ext cx="8331200" cy="355600"/>
+          </a:xfrm>
+          <a:prstGeom prst="rect">
+            <a:avLst/>
+          </a:prstGeom>
+          <a:solidFill>
+            <a:srgbClr val="0A1420"/>
+          </a:solidFill>
+          <a:ln>
+            <a:solidFill>
+              <a:srgbClr val="1E2A3A"/>
+            </a:solidFill>
+          </a:ln>
+        </p:spPr>
+        <p:style>
+          <a:lnRef idx="1">
+            <a:schemeClr val="accent1"/>
+          </a:lnRef>
+          <a:fillRef idx="3">
+            <a:schemeClr val="accent1"/>
+          </a:fillRef>
+          <a:effectRef idx="2">
+            <a:schemeClr val="accent1"/>
+          </a:effectRef>
+          <a:fontRef idx="minor">
+            <a:schemeClr val="lt1"/>
+          </a:fontRef>
+        </p:style>
+        <p:txBody>
+          <a:bodyPr rtlCol="0" anchor="ctr"/>
+          <a:lstStyle/>
+          <a:p>
+            <a:pPr algn="ctr"/>
+            <a:endParaRPr/>
+          </a:p>
+        </p:txBody>
+      </p:sp>
+      <p:sp>
+        <p:nvSpPr>
+          <p:cNvPr id="8" name="Rectangle 7"/>
+          <p:cNvSpPr/>
+          <p:nvPr/>
+        </p:nvSpPr>
+        <p:spPr>
+          <a:xfrm>
+            <a:off x="406400" y="3632200"/>
+            <a:ext cx="8331200" cy="355600"/>
+          </a:xfrm>
+          <a:prstGeom prst="rect">
+            <a:avLst/>
+          </a:prstGeom>
+          <a:solidFill>
+            <a:srgbClr val="0A1420"/>
+          </a:solidFill>
+          <a:ln>
+            <a:solidFill>
+              <a:srgbClr val="1E2A3A"/>
+            </a:solidFill>
+          </a:ln>
+        </p:spPr>
+        <p:style>
+          <a:lnRef idx="1">
+            <a:schemeClr val="accent1"/>
+          </a:lnRef>
+          <a:fillRef idx="3">
+            <a:schemeClr val="accent1"/>
+          </a:fillRef>
+          <a:effectRef idx="2">
+            <a:schemeClr val="accent1"/>
+          </a:effectRef>
+          <a:fontRef idx="minor">
+            <a:schemeClr val="lt1"/>
+          </a:fontRef>
+        </p:style>
+        <p:txBody>
+          <a:bodyPr rtlCol="0" anchor="ctr"/>
+          <a:lstStyle/>
+          <a:p>
+            <a:pPr algn="ctr"/>
+            <a:endParaRPr/>
+          </a:p>
+        </p:txBody>
+      </p:sp>
+      <p:sp>
+        <p:nvSpPr>
+          <p:cNvPr id="7" name="Rectangle 6"/>
+          <p:cNvSpPr/>
+          <p:nvPr/>
+        </p:nvSpPr>
+        <p:spPr>
+          <a:xfrm>
+            <a:off x="406400" y="2870200"/>
+            <a:ext cx="8331200" cy="355600"/>
+          </a:xfrm>
+          <a:prstGeom prst="rect">
+            <a:avLst/>
+          </a:prstGeom>
+          <a:solidFill>
+            <a:srgbClr val="0A1420"/>
+          </a:solidFill>
+          <a:ln>
+            <a:solidFill>
+              <a:srgbClr val="1E2A3A"/>
+            </a:solidFill>
+          </a:ln>
+        </p:spPr>
+        <p:style>
+          <a:lnRef idx="1">
+            <a:schemeClr val="accent1"/>
+          </a:lnRef>
+          <a:fillRef idx="3">
+            <a:schemeClr val="accent1"/>
+          </a:fillRef>
+          <a:effectRef idx="2">
+            <a:schemeClr val="accent1"/>
+          </a:effectRef>
+          <a:fontRef idx="minor">
+            <a:schemeClr val="lt1"/>
+          </a:fontRef>
+        </p:style>
+        <p:txBody>
+          <a:bodyPr rtlCol="0" anchor="ctr"/>
+          <a:lstStyle/>
+          <a:p>
+            <a:pPr algn="ctr"/>
+            <a:endParaRPr/>
+          </a:p>
+        </p:txBody>
+      </p:sp>
+      <p:sp>
+        <p:nvSpPr>
+          <p:cNvPr id="6" name="Rectangle 5"/>
+          <p:cNvSpPr/>
+          <p:nvPr/>
+        </p:nvSpPr>
+        <p:spPr>
+          <a:xfrm>
+            <a:off x="406400" y="2108200"/>
+            <a:ext cx="8331200" cy="609600"/>
+          </a:xfrm>
+          <a:prstGeom prst="rect">
+            <a:avLst/>
+          </a:prstGeom>
+          <a:solidFill>
+            <a:srgbClr val="0A1420"/>
+          </a:solidFill>
+          <a:ln>
+            <a:solidFill>
+              <a:srgbClr val="1E2A3A"/>
+            </a:solidFill>
+          </a:ln>
+        </p:spPr>
+        <p:style>
+          <a:lnRef idx="1">
+            <a:schemeClr val="accent1"/>
+          </a:lnRef>
+          <a:fillRef idx="3">
+            <a:schemeClr val="accent1"/>
+          </a:fillRef>
+          <a:effectRef idx="2">
+            <a:schemeClr val="accent1"/>
+          </a:effectRef>
+          <a:fontRef idx="minor">
+            <a:schemeClr val="lt1"/>
+          </a:fontRef>
+        </p:style>
+        <p:txBody>
+          <a:bodyPr rtlCol="0" anchor="ctr"/>
+          <a:lstStyle/>
+          <a:p>
+            <a:pPr algn="ctr"/>
+            <a:endParaRPr/>
+          </a:p>
+        </p:txBody>
+      </p:sp>
+      <p:sp>
+        <p:nvSpPr>
           <p:cNvPr id="2" name="Title 1"/>
           <p:cNvSpPr>
             <a:spLocks noGrp="1"/>
@@ -6223,7 +6950,11 @@
           <a:lstStyle/>
           <a:p>
             <a:r>
-              <a:rPr dirty="0"/>
+              <a:rPr sz="2800" b="1" dirty="0">
+                <a:solidFill>
+                  <a:srgbClr val="FFFFFF"/>
+                </a:solidFill>
+              </a:rPr>
               <a:t>Demo: Scratch with Python App</a:t>
             </a:r>
           </a:p>
@@ -6247,97 +6978,162 @@
           <a:lstStyle/>
           <a:p>
             <a:r>
-              <a:rPr lang="en-US" b="1" dirty="0"/>
+              <a:rPr lang="en-US" sz="1600" b="1" dirty="0">
+                <a:solidFill>
+                  <a:srgbClr val="F7A800"/>
+                </a:solidFill>
+              </a:rPr>
               <a:t>07-demo-scratch-python  --  Python Flask app, Alpine builder, FROM scratch</a:t>
             </a:r>
           </a:p>
           <a:p>
             <a:r>
-              <a:rPr lang="en-US" b="1" dirty="0"/>
+              <a:rPr lang="en-US" sz="1600" b="1" dirty="0">
+                <a:solidFill>
+                  <a:srgbClr val="F7A800"/>
+                </a:solidFill>
+              </a:rPr>
               <a:t>Build and run:</a:t>
             </a:r>
           </a:p>
           <a:p>
             <a:pPr lvl="1"/>
             <a:r>
-              <a:rPr lang="en-US" dirty="0"/>
+              <a:rPr lang="en-US" sz="1300" b="0" dirty="0">
+                <a:solidFill>
+                  <a:srgbClr val="A8D8FF"/>
+                </a:solidFill>
+                <a:latin typeface="Courier New"/>
+              </a:rPr>
               <a:t>docker build -f Dockerfile -t 07-demo-scratch-python ..</a:t>
             </a:r>
           </a:p>
           <a:p>
             <a:pPr lvl="1"/>
             <a:r>
-              <a:rPr lang="en-US" dirty="0"/>
+              <a:rPr lang="en-US" sz="1300" b="0" dirty="0">
+                <a:solidFill>
+                  <a:srgbClr val="A8D8FF"/>
+                </a:solidFill>
+                <a:latin typeface="Courier New"/>
+              </a:rPr>
               <a:t>docker run -d --name 07-demo-scratch-python -p 5007:5000 07-demo-scratch-python</a:t>
             </a:r>
           </a:p>
           <a:p>
             <a:r>
-              <a:rPr lang="en-US" b="1" dirty="0"/>
+              <a:rPr lang="en-US" sz="1600" b="1" dirty="0">
+                <a:solidFill>
+                  <a:srgbClr val="F7A800"/>
+                </a:solidFill>
+              </a:rPr>
               <a:t>Normal request:</a:t>
             </a:r>
           </a:p>
           <a:p>
             <a:pPr lvl="1"/>
             <a:r>
-              <a:rPr lang="en-US" dirty="0"/>
+              <a:rPr lang="en-US" sz="1300" b="0" dirty="0">
+                <a:solidFill>
+                  <a:srgbClr val="A8D8FF"/>
+                </a:solidFill>
+                <a:latin typeface="Courier New"/>
+              </a:rPr>
               <a:t>curl "http://localhost:5007/ping?host=8.8.8.8"</a:t>
             </a:r>
           </a:p>
           <a:p>
             <a:pPr lvl="1"/>
             <a:r>
-              <a:rPr lang="en-US" dirty="0"/>
+              <a:rPr lang="en-US" sz="1600" dirty="0">
+                <a:solidFill>
+                  <a:srgbClr val="D0D8E0"/>
+                </a:solidFill>
+              </a:rPr>
               <a:t>HTTP 500 -- subprocess(shell=True) needs /bin/sh, which does not exist</a:t>
             </a:r>
           </a:p>
           <a:p>
             <a:r>
-              <a:rPr lang="en-US" b="1" dirty="0"/>
+              <a:rPr lang="en-US" sz="1600" b="1" dirty="0">
+                <a:solidFill>
+                  <a:srgbClr val="F7A800"/>
+                </a:solidFill>
+              </a:rPr>
               <a:t>Exploit attempt:</a:t>
             </a:r>
           </a:p>
           <a:p>
             <a:pPr lvl="1"/>
             <a:r>
-              <a:rPr lang="en-US" dirty="0"/>
+              <a:rPr lang="en-US" sz="1300" b="0" dirty="0">
+                <a:solidFill>
+                  <a:srgbClr val="A8D8FF"/>
+                </a:solidFill>
+                <a:latin typeface="Courier New"/>
+              </a:rPr>
               <a:t>curl "http://localhost:5007/ping?host=8.8.8.8%3B+id"</a:t>
             </a:r>
           </a:p>
           <a:p>
             <a:pPr lvl="1"/>
             <a:r>
-              <a:rPr lang="en-US" dirty="0"/>
+              <a:rPr lang="en-US" sz="1600" dirty="0">
+                <a:solidFill>
+                  <a:srgbClr val="D0D8E0"/>
+                </a:solidFill>
+              </a:rPr>
               <a:t>HTTP 500 -- /bin/sh missing, exploit never executes</a:t>
             </a:r>
           </a:p>
           <a:p>
             <a:r>
-              <a:rPr lang="en-US" b="1" dirty="0"/>
+              <a:rPr lang="en-US" sz="1600" b="1" dirty="0">
+                <a:solidFill>
+                  <a:srgbClr val="F7A800"/>
+                </a:solidFill>
+              </a:rPr>
               <a:t>Shell exec:</a:t>
             </a:r>
           </a:p>
           <a:p>
             <a:pPr lvl="1"/>
             <a:r>
-              <a:rPr lang="en-US" dirty="0"/>
+              <a:rPr lang="en-US" sz="1300" b="0" dirty="0">
+                <a:solidFill>
+                  <a:srgbClr val="A8D8FF"/>
+                </a:solidFill>
+                <a:latin typeface="Courier New"/>
+              </a:rPr>
               <a:t>docker exec 07-demo-scratch-python /bin/sh</a:t>
             </a:r>
           </a:p>
           <a:p>
             <a:pPr lvl="1"/>
             <a:r>
-              <a:rPr lang="en-US" dirty="0"/>
+              <a:rPr lang="en-US" sz="1600" dirty="0">
+                <a:solidFill>
+                  <a:srgbClr val="D0D8E0"/>
+                </a:solidFill>
+              </a:rPr>
               <a:t>OCI error: /bin/sh: no such file or directory</a:t>
             </a:r>
           </a:p>
           <a:p>
             <a:r>
-              <a:rPr lang="en-US" b="1" dirty="0"/>
+              <a:rPr lang="en-US" sz="1600" b="1" dirty="0">
+                <a:solidFill>
+                  <a:srgbClr val="F7A800"/>
+                </a:solidFill>
+              </a:rPr>
               <a:t>Image size:</a:t>
             </a:r>
             <a:r>
-              <a:rPr lang="en-US" dirty="0"/>
+              <a:rPr lang="en-US" sz="1600" dirty="0">
+                <a:solidFill>
+                  <a:srgbClr val="D0D8E0"/>
+                </a:solidFill>
+              </a:rPr>
               <a:t> 112 MB</a:t>
             </a:r>
           </a:p>
@@ -6377,8 +7173,59 @@
               </a:defRPr>
             </a:pPr>
             <a:r>
+              <a:rPr sz="1000" i="1">
+                <a:solidFill>
+                  <a:srgbClr val="607890"/>
+                </a:solidFill>
+              </a:rPr>
               <a:t>Additional implementation details, Dockerfiles, scripts, and speaker notes will be available in the GitHub repository.</a:t>
             </a:r>
+          </a:p>
+        </p:txBody>
+      </p:sp>
+      <p:sp>
+        <p:nvSpPr>
+          <p:cNvPr id="5" name="Rectangle 4"/>
+          <p:cNvSpPr/>
+          <p:nvPr/>
+        </p:nvSpPr>
+        <p:spPr>
+          <a:xfrm>
+            <a:off x="411480" y="1261872"/>
+            <a:ext cx="8321040" cy="40000"/>
+          </a:xfrm>
+          <a:prstGeom prst="rect">
+            <a:avLst/>
+          </a:prstGeom>
+          <a:solidFill>
+            <a:srgbClr val="00BCEB"/>
+          </a:solidFill>
+          <a:ln>
+            <a:solidFill>
+              <a:srgbClr val="1E2A3A"/>
+            </a:solidFill>
+          </a:ln>
+        </p:spPr>
+        <p:style>
+          <a:lnRef idx="1">
+            <a:schemeClr val="accent1"/>
+          </a:lnRef>
+          <a:fillRef idx="3">
+            <a:schemeClr val="accent1"/>
+          </a:fillRef>
+          <a:effectRef idx="2">
+            <a:schemeClr val="accent1"/>
+          </a:effectRef>
+          <a:fontRef idx="minor">
+            <a:schemeClr val="lt1"/>
+          </a:fontRef>
+        </p:style>
+        <p:txBody>
+          <a:bodyPr rtlCol="0" anchor="ctr"/>
+          <a:lstStyle/>
+          <a:p>
+            <a:pPr algn="ctr"/>
+            <a:endParaRPr/>
           </a:p>
         </p:txBody>
       </p:sp>
@@ -6393,6 +7240,14 @@
 <file path=ppt/slides/slide13.xml><?xml version="1.0" encoding="utf-8"?>
 <p:sld xmlns:a="http://schemas.openxmlformats.org/drawingml/2006/main" xmlns:r="http://schemas.openxmlformats.org/officeDocument/2006/relationships" xmlns:p="http://schemas.openxmlformats.org/presentationml/2006/main">
   <p:cSld>
+    <p:bg>
+      <p:bgPr>
+        <a:solidFill>
+          <a:srgbClr val="1E2A3A"/>
+        </a:solidFill>
+        <a:effectLst/>
+      </p:bgPr>
+    </p:bg>
     <p:spTree>
       <p:nvGrpSpPr>
         <p:cNvPr id="1" name=""/>
@@ -6425,6 +7280,11 @@
           <a:lstStyle/>
           <a:p>
             <a:r>
+              <a:rPr sz="2800" b="1">
+                <a:solidFill>
+                  <a:srgbClr val="FFFFFF"/>
+                </a:solidFill>
+              </a:rPr>
               <a:t>Distroless as the Practical Middle Ground</a:t>
             </a:r>
           </a:p>
@@ -6446,16 +7306,31 @@
           <a:lstStyle/>
           <a:p>
             <a:r>
+              <a:rPr sz="1600">
+                <a:solidFill>
+                  <a:srgbClr val="D0D8E0"/>
+                </a:solidFill>
+              </a:rPr>
               <a:t>Scratch is secure but operationally painful.</a:t>
             </a:r>
           </a:p>
           <a:p>
             <a:r>
+              <a:rPr sz="1600">
+                <a:solidFill>
+                  <a:srgbClr val="D0D8E0"/>
+                </a:solidFill>
+              </a:rPr>
               <a:t>Traditional distros are convenient but bloated.</a:t>
             </a:r>
           </a:p>
           <a:p>
             <a:r>
+              <a:rPr sz="1600">
+                <a:solidFill>
+                  <a:srgbClr val="D0D8E0"/>
+                </a:solidFill>
+              </a:rPr>
               <a:t>Distroless balances minimalism and usability.</a:t>
             </a:r>
           </a:p>
@@ -6491,8 +7366,59 @@
               </a:defRPr>
             </a:pPr>
             <a:r>
+              <a:rPr sz="1000" i="1">
+                <a:solidFill>
+                  <a:srgbClr val="607890"/>
+                </a:solidFill>
+              </a:rPr>
               <a:t>Additional implementation details, Dockerfiles, scripts, and speaker notes will be available in the GitHub repository.</a:t>
             </a:r>
+          </a:p>
+        </p:txBody>
+      </p:sp>
+      <p:sp>
+        <p:nvSpPr>
+          <p:cNvPr id="5" name="Rectangle 4"/>
+          <p:cNvSpPr/>
+          <p:nvPr/>
+        </p:nvSpPr>
+        <p:spPr>
+          <a:xfrm>
+            <a:off x="411480" y="1261872"/>
+            <a:ext cx="8321040" cy="40000"/>
+          </a:xfrm>
+          <a:prstGeom prst="rect">
+            <a:avLst/>
+          </a:prstGeom>
+          <a:solidFill>
+            <a:srgbClr val="00BCEB"/>
+          </a:solidFill>
+          <a:ln>
+            <a:solidFill>
+              <a:srgbClr val="1E2A3A"/>
+            </a:solidFill>
+          </a:ln>
+        </p:spPr>
+        <p:style>
+          <a:lnRef idx="1">
+            <a:schemeClr val="accent1"/>
+          </a:lnRef>
+          <a:fillRef idx="3">
+            <a:schemeClr val="accent1"/>
+          </a:fillRef>
+          <a:effectRef idx="2">
+            <a:schemeClr val="accent1"/>
+          </a:effectRef>
+          <a:fontRef idx="minor">
+            <a:schemeClr val="lt1"/>
+          </a:fontRef>
+        </p:style>
+        <p:txBody>
+          <a:bodyPr rtlCol="0" anchor="ctr"/>
+          <a:lstStyle/>
+          <a:p>
+            <a:pPr algn="ctr"/>
+            <a:endParaRPr/>
           </a:p>
         </p:txBody>
       </p:sp>
@@ -6507,6 +7433,14 @@
 <file path=ppt/slides/slide14.xml><?xml version="1.0" encoding="utf-8"?>
 <p:sld xmlns:a="http://schemas.openxmlformats.org/drawingml/2006/main" xmlns:r="http://schemas.openxmlformats.org/officeDocument/2006/relationships" xmlns:p="http://schemas.openxmlformats.org/presentationml/2006/main">
   <p:cSld>
+    <p:bg>
+      <p:bgPr>
+        <a:solidFill>
+          <a:srgbClr val="1E2A3A"/>
+        </a:solidFill>
+        <a:effectLst/>
+      </p:bgPr>
+    </p:bg>
     <p:spTree>
       <p:nvGrpSpPr>
         <p:cNvPr id="1" name=""/>
@@ -6537,6 +7471,11 @@
           <a:lstStyle/>
           <a:p>
             <a:r>
+              <a:rPr sz="2800" b="1">
+                <a:solidFill>
+                  <a:srgbClr val="FFFFFF"/>
+                </a:solidFill>
+              </a:rPr>
               <a:t>Introducing Chainguard Images</a:t>
             </a:r>
           </a:p>
@@ -6565,37 +7504,65 @@
           <a:lstStyle/>
           <a:p>
             <a:r>
-              <a:rPr dirty="0" err="1"/>
+              <a:rPr sz="1600" dirty="0" err="1">
+                <a:solidFill>
+                  <a:srgbClr val="D0D8E0"/>
+                </a:solidFill>
+              </a:rPr>
               <a:t>Wolfi</a:t>
             </a:r>
             <a:r>
-              <a:rPr dirty="0"/>
+              <a:rPr sz="1600" dirty="0">
+                <a:solidFill>
+                  <a:srgbClr val="D0D8E0"/>
+                </a:solidFill>
+              </a:rPr>
               <a:t> foundation</a:t>
             </a:r>
           </a:p>
           <a:p>
             <a:r>
-              <a:rPr dirty="0" err="1"/>
+              <a:rPr sz="1600" dirty="0" err="1">
+                <a:solidFill>
+                  <a:srgbClr val="D0D8E0"/>
+                </a:solidFill>
+              </a:rPr>
               <a:t>Distroless</a:t>
             </a:r>
             <a:r>
-              <a:rPr lang="en-US" dirty="0"/>
+              <a:rPr lang="en-US" sz="1600" dirty="0">
+                <a:solidFill>
+                  <a:srgbClr val="D0D8E0"/>
+                </a:solidFill>
+              </a:rPr>
               <a:t> but </a:t>
             </a:r>
             <a:r>
-              <a:rPr dirty="0"/>
+              <a:rPr sz="1600" dirty="0">
+                <a:solidFill>
+                  <a:srgbClr val="D0D8E0"/>
+                </a:solidFill>
+              </a:rPr>
               <a:t>friendly runtimes</a:t>
             </a:r>
           </a:p>
           <a:p>
             <a:r>
-              <a:rPr dirty="0"/>
+              <a:rPr sz="1600" dirty="0">
+                <a:solidFill>
+                  <a:srgbClr val="D0D8E0"/>
+                </a:solidFill>
+              </a:rPr>
               <a:t>Signed artifacts</a:t>
             </a:r>
           </a:p>
           <a:p>
             <a:r>
-              <a:rPr dirty="0"/>
+              <a:rPr sz="1600" dirty="0">
+                <a:solidFill>
+                  <a:srgbClr val="D0D8E0"/>
+                </a:solidFill>
+              </a:rPr>
               <a:t>Continuously rebuilt images</a:t>
             </a:r>
           </a:p>
@@ -6631,6 +7598,11 @@
               </a:defRPr>
             </a:pPr>
             <a:r>
+              <a:rPr sz="1000" i="1">
+                <a:solidFill>
+                  <a:srgbClr val="607890"/>
+                </a:solidFill>
+              </a:rPr>
               <a:t>Additional implementation details, Dockerfiles, scripts, and speaker notes will be available in the GitHub repository.</a:t>
             </a:r>
           </a:p>
@@ -6666,6 +7638,52 @@
           </a:prstGeom>
         </p:spPr>
       </p:pic>
+      <p:sp>
+        <p:nvSpPr>
+          <p:cNvPr id="7" name="Rectangle 6"/>
+          <p:cNvSpPr/>
+          <p:nvPr/>
+        </p:nvSpPr>
+        <p:spPr>
+          <a:xfrm>
+            <a:off x="411480" y="1261872"/>
+            <a:ext cx="8321040" cy="40000"/>
+          </a:xfrm>
+          <a:prstGeom prst="rect">
+            <a:avLst/>
+          </a:prstGeom>
+          <a:solidFill>
+            <a:srgbClr val="00BCEB"/>
+          </a:solidFill>
+          <a:ln>
+            <a:solidFill>
+              <a:srgbClr val="1E2A3A"/>
+            </a:solidFill>
+          </a:ln>
+        </p:spPr>
+        <p:style>
+          <a:lnRef idx="1">
+            <a:schemeClr val="accent1"/>
+          </a:lnRef>
+          <a:fillRef idx="3">
+            <a:schemeClr val="accent1"/>
+          </a:fillRef>
+          <a:effectRef idx="2">
+            <a:schemeClr val="accent1"/>
+          </a:effectRef>
+          <a:fontRef idx="minor">
+            <a:schemeClr val="lt1"/>
+          </a:fontRef>
+        </p:style>
+        <p:txBody>
+          <a:bodyPr rtlCol="0" anchor="ctr"/>
+          <a:lstStyle/>
+          <a:p>
+            <a:pPr algn="ctr"/>
+            <a:endParaRPr/>
+          </a:p>
+        </p:txBody>
+      </p:sp>
     </p:spTree>
   </p:cSld>
   <p:clrMapOvr>
@@ -6677,6 +7695,14 @@
 <file path=ppt/slides/slide15.xml><?xml version="1.0" encoding="utf-8"?>
 <p:sld xmlns:a="http://schemas.openxmlformats.org/drawingml/2006/main" xmlns:r="http://schemas.openxmlformats.org/officeDocument/2006/relationships" xmlns:p="http://schemas.openxmlformats.org/presentationml/2006/main">
   <p:cSld>
+    <p:bg>
+      <p:bgPr>
+        <a:solidFill>
+          <a:srgbClr val="1E2A3A"/>
+        </a:solidFill>
+        <a:effectLst/>
+      </p:bgPr>
+    </p:bg>
     <p:spTree>
       <p:nvGrpSpPr>
         <p:cNvPr id="1" name=""/>
@@ -6709,6 +7735,11 @@
           <a:lstStyle/>
           <a:p>
             <a:r>
+              <a:rPr sz="2800" b="1">
+                <a:solidFill>
+                  <a:srgbClr val="FFFFFF"/>
+                </a:solidFill>
+              </a:rPr>
               <a:t>Continuous Rebuilds and Supply Chain Visibility</a:t>
             </a:r>
           </a:p>
@@ -6730,16 +7761,31 @@
           <a:lstStyle/>
           <a:p>
             <a:r>
+              <a:rPr sz="1600">
+                <a:solidFill>
+                  <a:srgbClr val="D0D8E0"/>
+                </a:solidFill>
+              </a:rPr>
               <a:t>Chainguard images are rebuilt daily from source.</a:t>
             </a:r>
           </a:p>
           <a:p>
             <a:r>
+              <a:rPr sz="1600">
+                <a:solidFill>
+                  <a:srgbClr val="D0D8E0"/>
+                </a:solidFill>
+              </a:rPr>
               <a:t>SBOMs and signed provenance improve visibility.</a:t>
             </a:r>
           </a:p>
           <a:p>
             <a:r>
+              <a:rPr sz="1600">
+                <a:solidFill>
+                  <a:srgbClr val="D0D8E0"/>
+                </a:solidFill>
+              </a:rPr>
               <a:t>Reduce vulnerability drift over time.</a:t>
             </a:r>
           </a:p>
@@ -6775,8 +7821,59 @@
               </a:defRPr>
             </a:pPr>
             <a:r>
+              <a:rPr sz="1000" i="1">
+                <a:solidFill>
+                  <a:srgbClr val="607890"/>
+                </a:solidFill>
+              </a:rPr>
               <a:t>Additional implementation details, Dockerfiles, scripts, and speaker notes will be available in the GitHub repository.</a:t>
             </a:r>
+          </a:p>
+        </p:txBody>
+      </p:sp>
+      <p:sp>
+        <p:nvSpPr>
+          <p:cNvPr id="5" name="Rectangle 4"/>
+          <p:cNvSpPr/>
+          <p:nvPr/>
+        </p:nvSpPr>
+        <p:spPr>
+          <a:xfrm>
+            <a:off x="411480" y="1261872"/>
+            <a:ext cx="8321040" cy="40000"/>
+          </a:xfrm>
+          <a:prstGeom prst="rect">
+            <a:avLst/>
+          </a:prstGeom>
+          <a:solidFill>
+            <a:srgbClr val="00BCEB"/>
+          </a:solidFill>
+          <a:ln>
+            <a:solidFill>
+              <a:srgbClr val="1E2A3A"/>
+            </a:solidFill>
+          </a:ln>
+        </p:spPr>
+        <p:style>
+          <a:lnRef idx="1">
+            <a:schemeClr val="accent1"/>
+          </a:lnRef>
+          <a:fillRef idx="3">
+            <a:schemeClr val="accent1"/>
+          </a:fillRef>
+          <a:effectRef idx="2">
+            <a:schemeClr val="accent1"/>
+          </a:effectRef>
+          <a:fontRef idx="minor">
+            <a:schemeClr val="lt1"/>
+          </a:fontRef>
+        </p:style>
+        <p:txBody>
+          <a:bodyPr rtlCol="0" anchor="ctr"/>
+          <a:lstStyle/>
+          <a:p>
+            <a:pPr algn="ctr"/>
+            <a:endParaRPr/>
           </a:p>
         </p:txBody>
       </p:sp>
@@ -6791,6 +7888,14 @@
 <file path=ppt/slides/slide16.xml><?xml version="1.0" encoding="utf-8"?>
 <p:sld xmlns:a="http://schemas.openxmlformats.org/drawingml/2006/main" xmlns:r="http://schemas.openxmlformats.org/officeDocument/2006/relationships" xmlns:p="http://schemas.openxmlformats.org/presentationml/2006/main">
   <p:cSld>
+    <p:bg>
+      <p:bgPr>
+        <a:solidFill>
+          <a:srgbClr val="1E2A3A"/>
+        </a:solidFill>
+        <a:effectLst/>
+      </p:bgPr>
+    </p:bg>
     <p:spTree>
       <p:nvGrpSpPr>
         <p:cNvPr id="1" name=""/>
@@ -6821,19 +7926,35 @@
           <a:lstStyle/>
           <a:p>
             <a:r>
-              <a:rPr dirty="0"/>
+              <a:rPr sz="2800" b="1" dirty="0">
+                <a:solidFill>
+                  <a:srgbClr val="FFFFFF"/>
+                </a:solidFill>
+              </a:rPr>
               <a:t>What Is </a:t>
             </a:r>
             <a:r>
-              <a:rPr dirty="0" err="1"/>
+              <a:rPr sz="2800" b="1" dirty="0" err="1">
+                <a:solidFill>
+                  <a:srgbClr val="FFFFFF"/>
+                </a:solidFill>
+              </a:rPr>
               <a:t>Wolfi</a:t>
             </a:r>
             <a:r>
-              <a:rPr lang="en-US" dirty="0"/>
+              <a:rPr lang="en-US" sz="2800" b="1" dirty="0">
+                <a:solidFill>
+                  <a:srgbClr val="FFFFFF"/>
+                </a:solidFill>
+              </a:rPr>
               <a:t> and Why</a:t>
             </a:r>
             <a:r>
-              <a:rPr dirty="0"/>
+              <a:rPr sz="2800" b="1" dirty="0">
+                <a:solidFill>
+                  <a:srgbClr val="FFFFFF"/>
+                </a:solidFill>
+              </a:rPr>
               <a:t>?</a:t>
             </a:r>
           </a:p>
@@ -6857,52 +7978,88 @@
           <a:lstStyle/>
           <a:p>
             <a:r>
-              <a:rPr dirty="0"/>
+              <a:rPr sz="1600" dirty="0">
+                <a:solidFill>
+                  <a:srgbClr val="D0D8E0"/>
+                </a:solidFill>
+              </a:rPr>
               <a:t>Container-focused </a:t>
             </a:r>
             <a:r>
-              <a:rPr dirty="0" err="1"/>
+              <a:rPr sz="1600" dirty="0" err="1">
+                <a:solidFill>
+                  <a:srgbClr val="D0D8E0"/>
+                </a:solidFill>
+              </a:rPr>
               <a:t>userspace</a:t>
             </a:r>
             <a:r>
-              <a:rPr dirty="0"/>
+              <a:rPr sz="1600" dirty="0">
+                <a:solidFill>
+                  <a:srgbClr val="D0D8E0"/>
+                </a:solidFill>
+              </a:rPr>
               <a:t> created by Chainguard.</a:t>
             </a:r>
           </a:p>
           <a:p>
             <a:r>
-              <a:rPr dirty="0"/>
+              <a:rPr sz="1600" dirty="0">
+                <a:solidFill>
+                  <a:srgbClr val="D0D8E0"/>
+                </a:solidFill>
+              </a:rPr>
               <a:t>Not a traditional Linux distribution.</a:t>
             </a:r>
           </a:p>
           <a:p>
             <a:r>
-              <a:rPr dirty="0"/>
+              <a:rPr sz="1600" dirty="0">
+                <a:solidFill>
+                  <a:srgbClr val="D0D8E0"/>
+                </a:solidFill>
+              </a:rPr>
               <a:t>Designed for secure cloud-native supply chains.</a:t>
             </a:r>
             <a:endParaRPr lang="en-US" dirty="0"/>
           </a:p>
           <a:p>
             <a:r>
-              <a:rPr lang="en-US" dirty="0"/>
+              <a:rPr lang="en-US" sz="1600" dirty="0">
+                <a:solidFill>
+                  <a:srgbClr val="D0D8E0"/>
+                </a:solidFill>
+              </a:rPr>
               <a:t>Reduce CVE noise</a:t>
             </a:r>
           </a:p>
           <a:p>
             <a:r>
-              <a:rPr lang="en-US" dirty="0"/>
+              <a:rPr lang="en-US" sz="1600" dirty="0">
+                <a:solidFill>
+                  <a:srgbClr val="D0D8E0"/>
+                </a:solidFill>
+              </a:rPr>
               <a:t>Enable rapid rebuilds</a:t>
             </a:r>
           </a:p>
           <a:p>
             <a:r>
-              <a:rPr lang="en-US" dirty="0"/>
+              <a:rPr lang="en-US" sz="1600" dirty="0">
+                <a:solidFill>
+                  <a:srgbClr val="D0D8E0"/>
+                </a:solidFill>
+              </a:rPr>
               <a:t>Granular packaging</a:t>
             </a:r>
           </a:p>
           <a:p>
             <a:r>
-              <a:rPr lang="en-US" dirty="0"/>
+              <a:rPr lang="en-US" sz="1600" dirty="0">
+                <a:solidFill>
+                  <a:srgbClr val="D0D8E0"/>
+                </a:solidFill>
+              </a:rPr>
               <a:t>Improve provenance and SBOM generation</a:t>
             </a:r>
             <a:endParaRPr dirty="0"/>
@@ -6939,8 +8096,59 @@
               </a:defRPr>
             </a:pPr>
             <a:r>
+              <a:rPr sz="1000" i="1">
+                <a:solidFill>
+                  <a:srgbClr val="607890"/>
+                </a:solidFill>
+              </a:rPr>
               <a:t>Additional implementation details, Dockerfiles, scripts, and speaker notes will be available in the GitHub repository.</a:t>
             </a:r>
+          </a:p>
+        </p:txBody>
+      </p:sp>
+      <p:sp>
+        <p:nvSpPr>
+          <p:cNvPr id="5" name="Rectangle 4"/>
+          <p:cNvSpPr/>
+          <p:nvPr/>
+        </p:nvSpPr>
+        <p:spPr>
+          <a:xfrm>
+            <a:off x="411480" y="1261872"/>
+            <a:ext cx="8321040" cy="40000"/>
+          </a:xfrm>
+          <a:prstGeom prst="rect">
+            <a:avLst/>
+          </a:prstGeom>
+          <a:solidFill>
+            <a:srgbClr val="00BCEB"/>
+          </a:solidFill>
+          <a:ln>
+            <a:solidFill>
+              <a:srgbClr val="1E2A3A"/>
+            </a:solidFill>
+          </a:ln>
+        </p:spPr>
+        <p:style>
+          <a:lnRef idx="1">
+            <a:schemeClr val="accent1"/>
+          </a:lnRef>
+          <a:fillRef idx="3">
+            <a:schemeClr val="accent1"/>
+          </a:fillRef>
+          <a:effectRef idx="2">
+            <a:schemeClr val="accent1"/>
+          </a:effectRef>
+          <a:fontRef idx="minor">
+            <a:schemeClr val="lt1"/>
+          </a:fontRef>
+        </p:style>
+        <p:txBody>
+          <a:bodyPr rtlCol="0" anchor="ctr"/>
+          <a:lstStyle/>
+          <a:p>
+            <a:pPr algn="ctr"/>
+            <a:endParaRPr/>
           </a:p>
         </p:txBody>
       </p:sp>
@@ -6955,6 +8163,14 @@
 <file path=ppt/slides/slide17.xml><?xml version="1.0" encoding="utf-8"?>
 <p:sld xmlns:a="http://schemas.openxmlformats.org/drawingml/2006/main" xmlns:r="http://schemas.openxmlformats.org/officeDocument/2006/relationships" xmlns:p="http://schemas.openxmlformats.org/presentationml/2006/main">
   <p:cSld>
+    <p:bg>
+      <p:bgPr>
+        <a:solidFill>
+          <a:srgbClr val="1E2A3A"/>
+        </a:solidFill>
+        <a:effectLst/>
+      </p:bgPr>
+    </p:bg>
     <p:spTree>
       <p:nvGrpSpPr>
         <p:cNvPr id="1" name=""/>
@@ -6971,6 +8187,52 @@
       </p:grpSpPr>
       <p:sp>
         <p:nvSpPr>
+          <p:cNvPr id="6" name="Rectangle 5"/>
+          <p:cNvSpPr/>
+          <p:nvPr/>
+        </p:nvSpPr>
+        <p:spPr>
+          <a:xfrm>
+            <a:off x="406400" y="3378200"/>
+            <a:ext cx="8331200" cy="355600"/>
+          </a:xfrm>
+          <a:prstGeom prst="rect">
+            <a:avLst/>
+          </a:prstGeom>
+          <a:solidFill>
+            <a:srgbClr val="0A1420"/>
+          </a:solidFill>
+          <a:ln>
+            <a:solidFill>
+              <a:srgbClr val="1E2A3A"/>
+            </a:solidFill>
+          </a:ln>
+        </p:spPr>
+        <p:style>
+          <a:lnRef idx="1">
+            <a:schemeClr val="accent1"/>
+          </a:lnRef>
+          <a:fillRef idx="3">
+            <a:schemeClr val="accent1"/>
+          </a:fillRef>
+          <a:effectRef idx="2">
+            <a:schemeClr val="accent1"/>
+          </a:effectRef>
+          <a:fontRef idx="minor">
+            <a:schemeClr val="lt1"/>
+          </a:fontRef>
+        </p:style>
+        <p:txBody>
+          <a:bodyPr rtlCol="0" anchor="ctr"/>
+          <a:lstStyle/>
+          <a:p>
+            <a:pPr algn="ctr"/>
+            <a:endParaRPr/>
+          </a:p>
+        </p:txBody>
+      </p:sp>
+      <p:sp>
+        <p:nvSpPr>
           <p:cNvPr id="2" name="Title 1"/>
           <p:cNvSpPr>
             <a:spLocks noGrp="1"/>
@@ -6985,6 +8247,11 @@
           <a:lstStyle/>
           <a:p>
             <a:r>
+              <a:rPr sz="2800" b="1">
+                <a:solidFill>
+                  <a:srgbClr val="FFFFFF"/>
+                </a:solidFill>
+              </a:rPr>
               <a:t>Chainguard Runtime Examples</a:t>
             </a:r>
           </a:p>
@@ -7008,14 +8275,22 @@
           <a:lstStyle/>
           <a:p>
             <a:r>
-              <a:rPr lang="en-US" b="1" dirty="0"/>
+              <a:rPr lang="en-US" sz="1600" b="1" dirty="0">
+                <a:solidFill>
+                  <a:srgbClr val="F7A800"/>
+                </a:solidFill>
+              </a:rPr>
               <a:t>08-demo-chainguard-python  (cgr.dev/chainguard/python:latest)</a:t>
             </a:r>
           </a:p>
           <a:p>
             <a:pPr lvl="1"/>
             <a:r>
-              <a:rPr lang="en-US" dirty="0"/>
+              <a:rPr lang="en-US" sz="1600" dirty="0">
+                <a:solidFill>
+                  <a:srgbClr val="D0D8E0"/>
+                </a:solidFill>
+              </a:rPr>
               <a:t>No shell -- subprocess(shell=True) fails with HTTP 500</a:t>
             </a:r>
           </a:p>
@@ -7024,14 +8299,22 @@
           </a:p>
           <a:p>
             <a:r>
-              <a:rPr lang="en-US" b="1" dirty="0"/>
+              <a:rPr lang="en-US" sz="1600" b="1" dirty="0">
+                <a:solidFill>
+                  <a:srgbClr val="F7A800"/>
+                </a:solidFill>
+              </a:rPr>
               <a:t>09-demo-chainguard-java  (cgr.dev/chainguard/jre:latest)</a:t>
             </a:r>
           </a:p>
           <a:p>
             <a:pPr lvl="1"/>
             <a:r>
-              <a:rPr lang="en-US" dirty="0"/>
+              <a:rPr lang="en-US" sz="1600" dirty="0">
+                <a:solidFill>
+                  <a:srgbClr val="D0D8E0"/>
+                </a:solidFill>
+              </a:rPr>
               <a:t>No shell -- Runtime.exec("/bin/sh") returns error in JSON</a:t>
             </a:r>
           </a:p>
@@ -7040,21 +8323,34 @@
           </a:p>
           <a:p>
             <a:r>
-              <a:rPr lang="en-US" b="1" dirty="0"/>
+              <a:rPr lang="en-US" sz="1600" b="1" dirty="0">
+                <a:solidFill>
+                  <a:srgbClr val="F7A800"/>
+                </a:solidFill>
+              </a:rPr>
               <a:t>10-demo-chainguard-node  (cgr.dev/chainguard/node:latest)</a:t>
             </a:r>
           </a:p>
           <a:p>
             <a:pPr lvl="1"/>
             <a:r>
-              <a:rPr lang="en-US" dirty="0"/>
+              <a:rPr lang="en-US" sz="1300" b="0" dirty="0">
+                <a:solidFill>
+                  <a:srgbClr val="A8D8FF"/>
+                </a:solidFill>
+                <a:latin typeface="Courier New"/>
+              </a:rPr>
               <a:t>/bin/sh IS present (busybox -- npm requires it) -- exploit WORKS</a:t>
             </a:r>
           </a:p>
           <a:p>
             <a:pPr lvl="1"/>
             <a:r>
-              <a:rPr lang="en-US" dirty="0"/>
+              <a:rPr lang="en-US" sz="1600" dirty="0">
+                <a:solidFill>
+                  <a:srgbClr val="D0D8E0"/>
+                </a:solidFill>
+              </a:rPr>
               <a:t>Chainguard does not mean no-shell. Runtime requirements drive content.</a:t>
             </a:r>
           </a:p>
@@ -7063,14 +8359,22 @@
           </a:p>
           <a:p>
             <a:r>
-              <a:rPr lang="en-US" b="1" dirty="0"/>
+              <a:rPr lang="en-US" sz="1600" b="1" dirty="0">
+                <a:solidFill>
+                  <a:srgbClr val="F7A800"/>
+                </a:solidFill>
+              </a:rPr>
               <a:t>11-demo-chainguard-go  (cgr.dev/chainguard/static:latest)</a:t>
             </a:r>
           </a:p>
           <a:p>
             <a:pPr lvl="1"/>
             <a:r>
-              <a:rPr lang="en-US" dirty="0"/>
+              <a:rPr lang="en-US" sz="1600" dirty="0">
+                <a:solidFill>
+                  <a:srgbClr val="D0D8E0"/>
+                </a:solidFill>
+              </a:rPr>
               <a:t>No shell -- exec.Command("/bin/sh") fails</a:t>
             </a:r>
           </a:p>
@@ -7079,7 +8383,11 @@
           </a:p>
           <a:p>
             <a:r>
-              <a:rPr lang="en-US" dirty="0"/>
+              <a:rPr lang="en-US" sz="1600" dirty="0">
+                <a:solidFill>
+                  <a:srgbClr val="D0D8E0"/>
+                </a:solidFill>
+              </a:rPr>
               <a:t>All images run as uid=65532 (nonroot)</a:t>
             </a:r>
           </a:p>
@@ -7115,8 +8423,59 @@
               </a:defRPr>
             </a:pPr>
             <a:r>
+              <a:rPr sz="1000" i="1">
+                <a:solidFill>
+                  <a:srgbClr val="607890"/>
+                </a:solidFill>
+              </a:rPr>
               <a:t>Additional implementation details, Dockerfiles, scripts, and speaker notes will be available in the GitHub repository.</a:t>
             </a:r>
+          </a:p>
+        </p:txBody>
+      </p:sp>
+      <p:sp>
+        <p:nvSpPr>
+          <p:cNvPr id="5" name="Rectangle 4"/>
+          <p:cNvSpPr/>
+          <p:nvPr/>
+        </p:nvSpPr>
+        <p:spPr>
+          <a:xfrm>
+            <a:off x="411480" y="1261872"/>
+            <a:ext cx="8321040" cy="40000"/>
+          </a:xfrm>
+          <a:prstGeom prst="rect">
+            <a:avLst/>
+          </a:prstGeom>
+          <a:solidFill>
+            <a:srgbClr val="00BCEB"/>
+          </a:solidFill>
+          <a:ln>
+            <a:solidFill>
+              <a:srgbClr val="1E2A3A"/>
+            </a:solidFill>
+          </a:ln>
+        </p:spPr>
+        <p:style>
+          <a:lnRef idx="1">
+            <a:schemeClr val="accent1"/>
+          </a:lnRef>
+          <a:fillRef idx="3">
+            <a:schemeClr val="accent1"/>
+          </a:fillRef>
+          <a:effectRef idx="2">
+            <a:schemeClr val="accent1"/>
+          </a:effectRef>
+          <a:fontRef idx="minor">
+            <a:schemeClr val="lt1"/>
+          </a:fontRef>
+        </p:style>
+        <p:txBody>
+          <a:bodyPr rtlCol="0" anchor="ctr"/>
+          <a:lstStyle/>
+          <a:p>
+            <a:pPr algn="ctr"/>
+            <a:endParaRPr/>
           </a:p>
         </p:txBody>
       </p:sp>
@@ -7131,6 +8490,14 @@
 <file path=ppt/slides/slide18.xml><?xml version="1.0" encoding="utf-8"?>
 <p:sld xmlns:a="http://schemas.openxmlformats.org/drawingml/2006/main" xmlns:r="http://schemas.openxmlformats.org/officeDocument/2006/relationships" xmlns:p="http://schemas.openxmlformats.org/presentationml/2006/main">
   <p:cSld>
+    <p:bg>
+      <p:bgPr>
+        <a:solidFill>
+          <a:srgbClr val="1E2A3A"/>
+        </a:solidFill>
+        <a:effectLst/>
+      </p:bgPr>
+    </p:bg>
     <p:spTree>
       <p:nvGrpSpPr>
         <p:cNvPr id="1" name=""/>
@@ -7163,7 +8530,11 @@
           <a:lstStyle/>
           <a:p>
             <a:r>
-              <a:rPr dirty="0"/>
+              <a:rPr sz="2800" b="1" dirty="0">
+                <a:solidFill>
+                  <a:srgbClr val="FFFFFF"/>
+                </a:solidFill>
+              </a:rPr>
               <a:t>FIPS Compliance and Containers</a:t>
             </a:r>
           </a:p>
@@ -7187,19 +8558,31 @@
           <a:lstStyle/>
           <a:p>
             <a:r>
-              <a:rPr dirty="0"/>
+              <a:rPr sz="1600" dirty="0">
+                <a:solidFill>
+                  <a:srgbClr val="D0D8E0"/>
+                </a:solidFill>
+              </a:rPr>
               <a:t>FIPS 140-2 / 140-3 cryptographic module validation</a:t>
             </a:r>
           </a:p>
           <a:p>
             <a:r>
-              <a:rPr dirty="0"/>
+              <a:rPr sz="1600" dirty="0">
+                <a:solidFill>
+                  <a:srgbClr val="D0D8E0"/>
+                </a:solidFill>
+              </a:rPr>
               <a:t>Important for regulated environments</a:t>
             </a:r>
           </a:p>
           <a:p>
             <a:r>
-              <a:rPr dirty="0"/>
+              <a:rPr sz="1600" dirty="0">
+                <a:solidFill>
+                  <a:srgbClr val="D0D8E0"/>
+                </a:solidFill>
+              </a:rPr>
               <a:t>Containers complicate crypto validation</a:t>
             </a:r>
             <a:endParaRPr lang="en-US" dirty="0"/>
@@ -7207,21 +8590,33 @@
           <a:p>
             <a:pPr lvl="1"/>
             <a:r>
-              <a:rPr lang="en-US" dirty="0"/>
+              <a:rPr lang="en-US" sz="1600" dirty="0">
+                <a:solidFill>
+                  <a:srgbClr val="D0D8E0"/>
+                </a:solidFill>
+              </a:rPr>
               <a:t>Custom OpenSSL builds</a:t>
             </a:r>
           </a:p>
           <a:p>
             <a:pPr lvl="1"/>
             <a:r>
-              <a:rPr lang="en-US" dirty="0"/>
+              <a:rPr lang="en-US" sz="1600" dirty="0">
+                <a:solidFill>
+                  <a:srgbClr val="D0D8E0"/>
+                </a:solidFill>
+              </a:rPr>
               <a:t>Runtime validation complexity</a:t>
             </a:r>
           </a:p>
           <a:p>
             <a:pPr lvl="1"/>
             <a:r>
-              <a:rPr lang="en-US" dirty="0"/>
+              <a:rPr lang="en-US" sz="1600" dirty="0">
+                <a:solidFill>
+                  <a:srgbClr val="D0D8E0"/>
+                </a:solidFill>
+              </a:rPr>
               <a:t>Operational overhead and patching pain</a:t>
             </a:r>
             <a:endParaRPr dirty="0"/>
@@ -7258,8 +8653,59 @@
               </a:defRPr>
             </a:pPr>
             <a:r>
+              <a:rPr sz="1000" i="1">
+                <a:solidFill>
+                  <a:srgbClr val="607890"/>
+                </a:solidFill>
+              </a:rPr>
               <a:t>Additional implementation details, Dockerfiles, scripts, and speaker notes will be available in the GitHub repository.</a:t>
             </a:r>
+          </a:p>
+        </p:txBody>
+      </p:sp>
+      <p:sp>
+        <p:nvSpPr>
+          <p:cNvPr id="5" name="Rectangle 4"/>
+          <p:cNvSpPr/>
+          <p:nvPr/>
+        </p:nvSpPr>
+        <p:spPr>
+          <a:xfrm>
+            <a:off x="411480" y="1261872"/>
+            <a:ext cx="8321040" cy="40000"/>
+          </a:xfrm>
+          <a:prstGeom prst="rect">
+            <a:avLst/>
+          </a:prstGeom>
+          <a:solidFill>
+            <a:srgbClr val="00BCEB"/>
+          </a:solidFill>
+          <a:ln>
+            <a:solidFill>
+              <a:srgbClr val="1E2A3A"/>
+            </a:solidFill>
+          </a:ln>
+        </p:spPr>
+        <p:style>
+          <a:lnRef idx="1">
+            <a:schemeClr val="accent1"/>
+          </a:lnRef>
+          <a:fillRef idx="3">
+            <a:schemeClr val="accent1"/>
+          </a:fillRef>
+          <a:effectRef idx="2">
+            <a:schemeClr val="accent1"/>
+          </a:effectRef>
+          <a:fontRef idx="minor">
+            <a:schemeClr val="lt1"/>
+          </a:fontRef>
+        </p:style>
+        <p:txBody>
+          <a:bodyPr rtlCol="0" anchor="ctr"/>
+          <a:lstStyle/>
+          <a:p>
+            <a:pPr algn="ctr"/>
+            <a:endParaRPr/>
           </a:p>
         </p:txBody>
       </p:sp>
@@ -7274,6 +8720,14 @@
 <file path=ppt/slides/slide19.xml><?xml version="1.0" encoding="utf-8"?>
 <p:sld xmlns:a="http://schemas.openxmlformats.org/drawingml/2006/main" xmlns:r="http://schemas.openxmlformats.org/officeDocument/2006/relationships" xmlns:p="http://schemas.openxmlformats.org/presentationml/2006/main">
   <p:cSld>
+    <p:bg>
+      <p:bgPr>
+        <a:solidFill>
+          <a:srgbClr val="1E2A3A"/>
+        </a:solidFill>
+        <a:effectLst/>
+      </p:bgPr>
+    </p:bg>
     <p:spTree>
       <p:nvGrpSpPr>
         <p:cNvPr id="1" name=""/>
@@ -7304,6 +8758,11 @@
           <a:lstStyle/>
           <a:p>
             <a:r>
+              <a:rPr sz="2800" b="1">
+                <a:solidFill>
+                  <a:srgbClr val="FFFFFF"/>
+                </a:solidFill>
+              </a:rPr>
               <a:t>Chainguard FIPS Images</a:t>
             </a:r>
           </a:p>
@@ -7327,13 +8786,21 @@
           <a:lstStyle/>
           <a:p>
             <a:r>
-              <a:rPr lang="en-US" b="1" dirty="0"/>
+              <a:rPr lang="en-US" sz="1600" b="1" dirty="0">
+                <a:solidFill>
+                  <a:srgbClr val="F7A800"/>
+                </a:solidFill>
+              </a:rPr>
               <a:t>12-demo-chainguard-fips-python  (python-fips-appd-3.13)</a:t>
             </a:r>
           </a:p>
           <a:p>
             <a:r>
-              <a:rPr lang="en-US" dirty="0"/>
+              <a:rPr lang="en-US" sz="1600" dirty="0">
+                <a:solidFill>
+                  <a:srgbClr val="D0D8E0"/>
+                </a:solidFill>
+              </a:rPr>
               <a:t>  No shell -- subprocess(shell=True) fails with HTTP 500</a:t>
             </a:r>
           </a:p>
@@ -7342,13 +8809,21 @@
           </a:p>
           <a:p>
             <a:r>
-              <a:rPr lang="en-US" b="1" dirty="0"/>
+              <a:rPr lang="en-US" sz="1600" b="1" dirty="0">
+                <a:solidFill>
+                  <a:srgbClr val="F7A800"/>
+                </a:solidFill>
+              </a:rPr>
               <a:t>13-demo-chainguard-fips-java  (jre-fips-appd-openjdk-17, BouncyCastle FIPS)</a:t>
             </a:r>
           </a:p>
           <a:p>
             <a:r>
-              <a:rPr lang="en-US" dirty="0"/>
+              <a:rPr lang="en-US" sz="1600" dirty="0">
+                <a:solidFill>
+                  <a:srgbClr val="D0D8E0"/>
+                </a:solidFill>
+              </a:rPr>
               <a:t>  No shell -- Runtime.exec("/bin/sh") returns error in JSON</a:t>
             </a:r>
           </a:p>
@@ -7357,13 +8832,21 @@
           </a:p>
           <a:p>
             <a:r>
-              <a:rPr lang="en-US" b="1" dirty="0"/>
+              <a:rPr lang="en-US" sz="1600" b="1" dirty="0">
+                <a:solidFill>
+                  <a:srgbClr val="F7A800"/>
+                </a:solidFill>
+              </a:rPr>
               <a:t>14-demo-chainguard-fips-node  (node-fips-appd-24-slim)</a:t>
             </a:r>
           </a:p>
           <a:p>
             <a:r>
-              <a:rPr lang="en-US" dirty="0"/>
+              <a:rPr lang="en-US" sz="1600" dirty="0">
+                <a:solidFill>
+                  <a:srgbClr val="D0D8E0"/>
+                </a:solidFill>
+              </a:rPr>
               <a:t>  No shell -- exec() returns ENOENT  (contrast: non-FIPS node has busybox)</a:t>
             </a:r>
           </a:p>
@@ -7372,13 +8855,21 @@
           </a:p>
           <a:p>
             <a:r>
-              <a:rPr lang="en-US" b="1" dirty="0"/>
+              <a:rPr lang="en-US" sz="1600" b="1" dirty="0">
+                <a:solidFill>
+                  <a:srgbClr val="F7A800"/>
+                </a:solidFill>
+              </a:rPr>
               <a:t>15-demo-chainguard-fips-go  (glibc-openssl-fips, systemcrypto + requirefips)</a:t>
             </a:r>
           </a:p>
           <a:p>
             <a:r>
-              <a:rPr lang="en-US" dirty="0"/>
+              <a:rPr lang="en-US" sz="1600" dirty="0">
+                <a:solidFill>
+                  <a:srgbClr val="D0D8E0"/>
+                </a:solidFill>
+              </a:rPr>
               <a:t>  No shell -- exec.Command("/bin/sh") returns ENOENT</a:t>
             </a:r>
           </a:p>
@@ -7387,7 +8878,11 @@
           </a:p>
           <a:p>
             <a:r>
-              <a:rPr lang="en-US" dirty="0"/>
+              <a:rPr lang="en-US" sz="1600" dirty="0">
+                <a:solidFill>
+                  <a:srgbClr val="D0D8E0"/>
+                </a:solidFill>
+              </a:rPr>
               <a:t>All images run as uid=65532 (nonroot)</a:t>
             </a:r>
           </a:p>
@@ -7423,8 +8918,59 @@
               </a:defRPr>
             </a:pPr>
             <a:r>
+              <a:rPr sz="1000" i="1">
+                <a:solidFill>
+                  <a:srgbClr val="607890"/>
+                </a:solidFill>
+              </a:rPr>
               <a:t>Additional implementation details, Dockerfiles, scripts, and speaker notes will be available in the GitHub repository.</a:t>
             </a:r>
+          </a:p>
+        </p:txBody>
+      </p:sp>
+      <p:sp>
+        <p:nvSpPr>
+          <p:cNvPr id="5" name="Rectangle 4"/>
+          <p:cNvSpPr/>
+          <p:nvPr/>
+        </p:nvSpPr>
+        <p:spPr>
+          <a:xfrm>
+            <a:off x="411480" y="1261872"/>
+            <a:ext cx="8321040" cy="40000"/>
+          </a:xfrm>
+          <a:prstGeom prst="rect">
+            <a:avLst/>
+          </a:prstGeom>
+          <a:solidFill>
+            <a:srgbClr val="00BCEB"/>
+          </a:solidFill>
+          <a:ln>
+            <a:solidFill>
+              <a:srgbClr val="1E2A3A"/>
+            </a:solidFill>
+          </a:ln>
+        </p:spPr>
+        <p:style>
+          <a:lnRef idx="1">
+            <a:schemeClr val="accent1"/>
+          </a:lnRef>
+          <a:fillRef idx="3">
+            <a:schemeClr val="accent1"/>
+          </a:fillRef>
+          <a:effectRef idx="2">
+            <a:schemeClr val="accent1"/>
+          </a:effectRef>
+          <a:fontRef idx="minor">
+            <a:schemeClr val="lt1"/>
+          </a:fontRef>
+        </p:style>
+        <p:txBody>
+          <a:bodyPr rtlCol="0" anchor="ctr"/>
+          <a:lstStyle/>
+          <a:p>
+            <a:pPr algn="ctr"/>
+            <a:endParaRPr/>
           </a:p>
         </p:txBody>
       </p:sp>
@@ -7439,6 +8985,14 @@
 <file path=ppt/slides/slide2.xml><?xml version="1.0" encoding="utf-8"?>
 <p:sld xmlns:a="http://schemas.openxmlformats.org/drawingml/2006/main" xmlns:r="http://schemas.openxmlformats.org/officeDocument/2006/relationships" xmlns:p="http://schemas.openxmlformats.org/presentationml/2006/main">
   <p:cSld>
+    <p:bg>
+      <p:bgPr>
+        <a:solidFill>
+          <a:srgbClr val="1E2A3A"/>
+        </a:solidFill>
+        <a:effectLst/>
+      </p:bgPr>
+    </p:bg>
     <p:spTree>
       <p:nvGrpSpPr>
         <p:cNvPr id="1" name=""/>
@@ -7469,6 +9023,11 @@
           <a:lstStyle/>
           <a:p>
             <a:r>
+              <a:rPr sz="2800" b="1">
+                <a:solidFill>
+                  <a:srgbClr val="FFFFFF"/>
+                </a:solidFill>
+              </a:rPr>
               <a:t>Who Am I?</a:t>
             </a:r>
           </a:p>
@@ -7490,35 +9049,55 @@
           <a:lstStyle/>
           <a:p>
             <a:r>
-              <a:rPr b="1"/>
+              <a:rPr sz="1600" b="1">
+                <a:solidFill>
+                  <a:srgbClr val="F7A800"/>
+                </a:solidFill>
+              </a:rPr>
               <a:t>Mello Bkirouac</a:t>
             </a:r>
           </a:p>
           <a:p>
             <a:pPr lvl="1"/>
             <a:r>
-              <a:rPr b="0"/>
+              <a:rPr sz="1600" b="0">
+                <a:solidFill>
+                  <a:srgbClr val="D0D8E0"/>
+                </a:solidFill>
+              </a:rPr>
               <a:t>Information Security Architect at Cisco</a:t>
             </a:r>
           </a:p>
           <a:p>
             <a:pPr lvl="1"/>
             <a:r>
-              <a:rPr b="0"/>
+              <a:rPr sz="1600" b="0">
+                <a:solidFill>
+                  <a:srgbClr val="D0D8E0"/>
+                </a:solidFill>
+              </a:rPr>
               <a:t>35 years in security architecture</a:t>
             </a:r>
           </a:p>
           <a:p>
             <a:pPr lvl="1"/>
             <a:r>
-              <a:rPr b="0"/>
+              <a:rPr sz="1600" b="0">
+                <a:solidFill>
+                  <a:srgbClr val="D0D8E0"/>
+                </a:solidFill>
+              </a:rPr>
               <a:t>OWASP Tampa member</a:t>
             </a:r>
           </a:p>
           <a:p>
             <a:pPr lvl="1"/>
             <a:r>
-              <a:rPr b="0"/>
+              <a:rPr sz="1600" b="0">
+                <a:solidFill>
+                  <a:srgbClr val="D0D8E0"/>
+                </a:solidFill>
+              </a:rPr>
               <a:t>Biker, Floridian, container security nerd</a:t>
             </a:r>
           </a:p>
@@ -7554,8 +9133,59 @@
               </a:defRPr>
             </a:pPr>
             <a:r>
+              <a:rPr sz="1000" i="1">
+                <a:solidFill>
+                  <a:srgbClr val="607890"/>
+                </a:solidFill>
+              </a:rPr>
               <a:t>Additional implementation details, Dockerfiles, scripts, and speaker notes will be available in the GitHub repository.</a:t>
             </a:r>
+          </a:p>
+        </p:txBody>
+      </p:sp>
+      <p:sp>
+        <p:nvSpPr>
+          <p:cNvPr id="5" name="Rectangle 4"/>
+          <p:cNvSpPr/>
+          <p:nvPr/>
+        </p:nvSpPr>
+        <p:spPr>
+          <a:xfrm>
+            <a:off x="411480" y="1261872"/>
+            <a:ext cx="8321040" cy="40000"/>
+          </a:xfrm>
+          <a:prstGeom prst="rect">
+            <a:avLst/>
+          </a:prstGeom>
+          <a:solidFill>
+            <a:srgbClr val="00BCEB"/>
+          </a:solidFill>
+          <a:ln>
+            <a:solidFill>
+              <a:srgbClr val="1E2A3A"/>
+            </a:solidFill>
+          </a:ln>
+        </p:spPr>
+        <p:style>
+          <a:lnRef idx="1">
+            <a:schemeClr val="accent1"/>
+          </a:lnRef>
+          <a:fillRef idx="3">
+            <a:schemeClr val="accent1"/>
+          </a:fillRef>
+          <a:effectRef idx="2">
+            <a:schemeClr val="accent1"/>
+          </a:effectRef>
+          <a:fontRef idx="minor">
+            <a:schemeClr val="lt1"/>
+          </a:fontRef>
+        </p:style>
+        <p:txBody>
+          <a:bodyPr rtlCol="0" anchor="ctr"/>
+          <a:lstStyle/>
+          <a:p>
+            <a:pPr algn="ctr"/>
+            <a:endParaRPr/>
           </a:p>
         </p:txBody>
       </p:sp>
@@ -7570,6 +9200,14 @@
 <file path=ppt/slides/slide20.xml><?xml version="1.0" encoding="utf-8"?>
 <p:sld xmlns:a="http://schemas.openxmlformats.org/drawingml/2006/main" xmlns:r="http://schemas.openxmlformats.org/officeDocument/2006/relationships" xmlns:p="http://schemas.openxmlformats.org/presentationml/2006/main">
   <p:cSld>
+    <p:bg>
+      <p:bgPr>
+        <a:solidFill>
+          <a:srgbClr val="1E2A3A"/>
+        </a:solidFill>
+        <a:effectLst/>
+      </p:bgPr>
+    </p:bg>
     <p:spTree>
       <p:nvGrpSpPr>
         <p:cNvPr id="1" name=""/>
@@ -7602,6 +9240,11 @@
           <a:lstStyle/>
           <a:p>
             <a:r>
+              <a:rPr sz="2800" b="1">
+                <a:solidFill>
+                  <a:srgbClr val="FFFFFF"/>
+                </a:solidFill>
+              </a:rPr>
               <a:t>FIPS Caveats and Compliance Reality</a:t>
             </a:r>
           </a:p>
@@ -7623,11 +9266,21 @@
           <a:lstStyle/>
           <a:p>
             <a:r>
+              <a:rPr sz="1600">
+                <a:solidFill>
+                  <a:srgbClr val="D0D8E0"/>
+                </a:solidFill>
+              </a:rPr>
               <a:t>FIPS-capable images do not automatically make deployments compliant.</a:t>
             </a:r>
           </a:p>
           <a:p>
             <a:r>
+              <a:rPr sz="1600">
+                <a:solidFill>
+                  <a:srgbClr val="D0D8E0"/>
+                </a:solidFill>
+              </a:rPr>
               <a:t>Runtime controls and governance still matter.</a:t>
             </a:r>
           </a:p>
@@ -7663,8 +9316,59 @@
               </a:defRPr>
             </a:pPr>
             <a:r>
+              <a:rPr sz="1000" i="1">
+                <a:solidFill>
+                  <a:srgbClr val="607890"/>
+                </a:solidFill>
+              </a:rPr>
               <a:t>Additional implementation details, Dockerfiles, scripts, and speaker notes will be available in the GitHub repository.</a:t>
             </a:r>
+          </a:p>
+        </p:txBody>
+      </p:sp>
+      <p:sp>
+        <p:nvSpPr>
+          <p:cNvPr id="5" name="Rectangle 4"/>
+          <p:cNvSpPr/>
+          <p:nvPr/>
+        </p:nvSpPr>
+        <p:spPr>
+          <a:xfrm>
+            <a:off x="411480" y="1261872"/>
+            <a:ext cx="8321040" cy="40000"/>
+          </a:xfrm>
+          <a:prstGeom prst="rect">
+            <a:avLst/>
+          </a:prstGeom>
+          <a:solidFill>
+            <a:srgbClr val="00BCEB"/>
+          </a:solidFill>
+          <a:ln>
+            <a:solidFill>
+              <a:srgbClr val="1E2A3A"/>
+            </a:solidFill>
+          </a:ln>
+        </p:spPr>
+        <p:style>
+          <a:lnRef idx="1">
+            <a:schemeClr val="accent1"/>
+          </a:lnRef>
+          <a:fillRef idx="3">
+            <a:schemeClr val="accent1"/>
+          </a:fillRef>
+          <a:effectRef idx="2">
+            <a:schemeClr val="accent1"/>
+          </a:effectRef>
+          <a:fontRef idx="minor">
+            <a:schemeClr val="lt1"/>
+          </a:fontRef>
+        </p:style>
+        <p:txBody>
+          <a:bodyPr rtlCol="0" anchor="ctr"/>
+          <a:lstStyle/>
+          <a:p>
+            <a:pPr algn="ctr"/>
+            <a:endParaRPr/>
           </a:p>
         </p:txBody>
       </p:sp>
@@ -7679,6 +9383,14 @@
 <file path=ppt/slides/slide21.xml><?xml version="1.0" encoding="utf-8"?>
 <p:sld xmlns:a="http://schemas.openxmlformats.org/drawingml/2006/main" xmlns:r="http://schemas.openxmlformats.org/officeDocument/2006/relationships" xmlns:p="http://schemas.openxmlformats.org/presentationml/2006/main">
   <p:cSld>
+    <p:bg>
+      <p:bgPr>
+        <a:solidFill>
+          <a:srgbClr val="1E2A3A"/>
+        </a:solidFill>
+        <a:effectLst/>
+      </p:bgPr>
+    </p:bg>
     <p:spTree>
       <p:nvGrpSpPr>
         <p:cNvPr id="1" name=""/>
@@ -7709,6 +9421,11 @@
           <a:lstStyle/>
           <a:p>
             <a:r>
+              <a:rPr sz="2800" b="1">
+                <a:solidFill>
+                  <a:srgbClr val="FFFFFF"/>
+                </a:solidFill>
+              </a:rPr>
               <a:t>Demo: Chainguard Package Counts</a:t>
             </a:r>
           </a:p>
@@ -7737,9 +9454,9 @@
           <a:lstStyle/>
           <a:p>
             <a:r>
-              <a:rPr sz="1100" b="1">
-                <a:solidFill>
-                  <a:srgbClr val="333333"/>
+              <a:rPr sz="1000" b="1" i="1">
+                <a:solidFill>
+                  <a:srgbClr val="607890"/>
                 </a:solidFill>
               </a:rPr>
               <a:t>docker export $(docker create &lt;image&gt;) | tar -xO usr/lib/apk/db/installed | grep "^P:" | wc -l</a:t>
@@ -7777,6 +9494,11 @@
               </a:defRPr>
             </a:pPr>
             <a:r>
+              <a:rPr sz="1000" i="1">
+                <a:solidFill>
+                  <a:srgbClr val="607890"/>
+                </a:solidFill>
+              </a:rPr>
               <a:t>Additional implementation details, Dockerfiles, scripts, and speaker notes will be available in the GitHub repository.</a:t>
             </a:r>
           </a:p>
@@ -8871,6 +10593,52 @@
           </a:graphicData>
         </a:graphic>
       </p:graphicFrame>
+      <p:sp>
+        <p:nvSpPr>
+          <p:cNvPr id="7" name="Rectangle 6"/>
+          <p:cNvSpPr/>
+          <p:nvPr/>
+        </p:nvSpPr>
+        <p:spPr>
+          <a:xfrm>
+            <a:off x="411480" y="1261872"/>
+            <a:ext cx="8321040" cy="40000"/>
+          </a:xfrm>
+          <a:prstGeom prst="rect">
+            <a:avLst/>
+          </a:prstGeom>
+          <a:solidFill>
+            <a:srgbClr val="00BCEB"/>
+          </a:solidFill>
+          <a:ln>
+            <a:solidFill>
+              <a:srgbClr val="1E2A3A"/>
+            </a:solidFill>
+          </a:ln>
+        </p:spPr>
+        <p:style>
+          <a:lnRef idx="1">
+            <a:schemeClr val="accent1"/>
+          </a:lnRef>
+          <a:fillRef idx="3">
+            <a:schemeClr val="accent1"/>
+          </a:fillRef>
+          <a:effectRef idx="2">
+            <a:schemeClr val="accent1"/>
+          </a:effectRef>
+          <a:fontRef idx="minor">
+            <a:schemeClr val="lt1"/>
+          </a:fontRef>
+        </p:style>
+        <p:txBody>
+          <a:bodyPr rtlCol="0" anchor="ctr"/>
+          <a:lstStyle/>
+          <a:p>
+            <a:pPr algn="ctr"/>
+            <a:endParaRPr/>
+          </a:p>
+        </p:txBody>
+      </p:sp>
     </p:spTree>
   </p:cSld>
   <p:clrMapOvr>
@@ -8882,6 +10650,14 @@
 <file path=ppt/slides/slide22.xml><?xml version="1.0" encoding="utf-8"?>
 <p:sld xmlns:a="http://schemas.openxmlformats.org/drawingml/2006/main" xmlns:r="http://schemas.openxmlformats.org/officeDocument/2006/relationships" xmlns:p="http://schemas.openxmlformats.org/presentationml/2006/main">
   <p:cSld>
+    <p:bg>
+      <p:bgPr>
+        <a:solidFill>
+          <a:srgbClr val="1E2A3A"/>
+        </a:solidFill>
+        <a:effectLst/>
+      </p:bgPr>
+    </p:bg>
     <p:spTree>
       <p:nvGrpSpPr>
         <p:cNvPr id="1" name=""/>
@@ -8898,6 +10674,98 @@
       </p:grpSpPr>
       <p:sp>
         <p:nvSpPr>
+          <p:cNvPr id="7" name="Rectangle 6"/>
+          <p:cNvSpPr/>
+          <p:nvPr/>
+        </p:nvSpPr>
+        <p:spPr>
+          <a:xfrm>
+            <a:off x="406400" y="3378201"/>
+            <a:ext cx="8331200" cy="863600"/>
+          </a:xfrm>
+          <a:prstGeom prst="rect">
+            <a:avLst/>
+          </a:prstGeom>
+          <a:solidFill>
+            <a:srgbClr val="0A1420"/>
+          </a:solidFill>
+          <a:ln>
+            <a:solidFill>
+              <a:srgbClr val="1E2A3A"/>
+            </a:solidFill>
+          </a:ln>
+        </p:spPr>
+        <p:style>
+          <a:lnRef idx="1">
+            <a:schemeClr val="accent1"/>
+          </a:lnRef>
+          <a:fillRef idx="3">
+            <a:schemeClr val="accent1"/>
+          </a:fillRef>
+          <a:effectRef idx="2">
+            <a:schemeClr val="accent1"/>
+          </a:effectRef>
+          <a:fontRef idx="minor">
+            <a:schemeClr val="lt1"/>
+          </a:fontRef>
+        </p:style>
+        <p:txBody>
+          <a:bodyPr rtlCol="0" anchor="ctr"/>
+          <a:lstStyle/>
+          <a:p>
+            <a:pPr algn="ctr"/>
+            <a:endParaRPr/>
+          </a:p>
+        </p:txBody>
+      </p:sp>
+      <p:sp>
+        <p:nvSpPr>
+          <p:cNvPr id="6" name="Rectangle 5"/>
+          <p:cNvSpPr/>
+          <p:nvPr/>
+        </p:nvSpPr>
+        <p:spPr>
+          <a:xfrm>
+            <a:off x="406400" y="2108201"/>
+            <a:ext cx="8331200" cy="863600"/>
+          </a:xfrm>
+          <a:prstGeom prst="rect">
+            <a:avLst/>
+          </a:prstGeom>
+          <a:solidFill>
+            <a:srgbClr val="0A1420"/>
+          </a:solidFill>
+          <a:ln>
+            <a:solidFill>
+              <a:srgbClr val="1E2A3A"/>
+            </a:solidFill>
+          </a:ln>
+        </p:spPr>
+        <p:style>
+          <a:lnRef idx="1">
+            <a:schemeClr val="accent1"/>
+          </a:lnRef>
+          <a:fillRef idx="3">
+            <a:schemeClr val="accent1"/>
+          </a:fillRef>
+          <a:effectRef idx="2">
+            <a:schemeClr val="accent1"/>
+          </a:effectRef>
+          <a:fontRef idx="minor">
+            <a:schemeClr val="lt1"/>
+          </a:fontRef>
+        </p:style>
+        <p:txBody>
+          <a:bodyPr rtlCol="0" anchor="ctr"/>
+          <a:lstStyle/>
+          <a:p>
+            <a:pPr algn="ctr"/>
+            <a:endParaRPr/>
+          </a:p>
+        </p:txBody>
+      </p:sp>
+      <p:sp>
+        <p:nvSpPr>
           <p:cNvPr id="2" name="Title 1"/>
           <p:cNvSpPr>
             <a:spLocks noGrp="1"/>
@@ -8914,7 +10782,11 @@
           <a:lstStyle/>
           <a:p>
             <a:r>
-              <a:rPr dirty="0"/>
+              <a:rPr sz="2800" b="1" dirty="0">
+                <a:solidFill>
+                  <a:srgbClr val="FFFFFF"/>
+                </a:solidFill>
+              </a:rPr>
               <a:t>Vulnerability Scanner Comparison Demo</a:t>
             </a:r>
           </a:p>
@@ -8943,46 +10815,84 @@
           <a:lstStyle/>
           <a:p>
             <a:r>
-              <a:rPr lang="en-US" dirty="0"/>
+              <a:rPr lang="en-US" sz="1600" dirty="0">
+                <a:solidFill>
+                  <a:srgbClr val="D0D8E0"/>
+                </a:solidFill>
+              </a:rPr>
               <a:t>Ran both scanners against all 15 demo images. Results on following slides.</a:t>
             </a:r>
           </a:p>
           <a:p>
             <a:r>
-              <a:rPr lang="en-US" b="1" dirty="0"/>
+              <a:rPr lang="en-US" sz="1600" b="1" dirty="0">
+                <a:solidFill>
+                  <a:srgbClr val="F7A800"/>
+                </a:solidFill>
+              </a:rPr>
               <a:t>Trivy:</a:t>
             </a:r>
           </a:p>
           <a:p>
             <a:pPr lvl="1"/>
             <a:r>
-              <a:rPr lang="en-US" dirty="0" err="1"/>
+              <a:rPr lang="en-US" sz="1300" b="0" dirty="0" err="1">
+                <a:solidFill>
+                  <a:srgbClr val="A8D8FF"/>
+                </a:solidFill>
+                <a:latin typeface="Courier New"/>
+              </a:rPr>
               <a:t>trivy</a:t>
             </a:r>
             <a:r>
-              <a:rPr lang="en-US" dirty="0"/>
+              <a:rPr lang="en-US" sz="1300" b="0" dirty="0">
+                <a:solidFill>
+                  <a:srgbClr val="A8D8FF"/>
+                </a:solidFill>
+                <a:latin typeface="Courier New"/>
+              </a:rPr>
               <a:t> image 01-demo-debian</a:t>
             </a:r>
           </a:p>
           <a:p>
             <a:pPr lvl="1"/>
             <a:r>
-              <a:rPr lang="en-US" dirty="0" err="1"/>
+              <a:rPr lang="en-US" sz="1300" b="0" dirty="0" err="1">
+                <a:solidFill>
+                  <a:srgbClr val="A8D8FF"/>
+                </a:solidFill>
+                <a:latin typeface="Courier New"/>
+              </a:rPr>
               <a:t>trivy</a:t>
             </a:r>
             <a:r>
-              <a:rPr lang="en-US" dirty="0"/>
+              <a:rPr lang="en-US" sz="1300" b="0" dirty="0">
+                <a:solidFill>
+                  <a:srgbClr val="A8D8FF"/>
+                </a:solidFill>
+                <a:latin typeface="Courier New"/>
+              </a:rPr>
               <a:t> image --severity HIGH,CRITICAL 01-demo-debian</a:t>
             </a:r>
           </a:p>
           <a:p>
             <a:pPr lvl="1"/>
             <a:r>
-              <a:rPr lang="en-US" dirty="0" err="1"/>
+              <a:rPr lang="en-US" sz="1300" b="0" dirty="0" err="1">
+                <a:solidFill>
+                  <a:srgbClr val="A8D8FF"/>
+                </a:solidFill>
+                <a:latin typeface="Courier New"/>
+              </a:rPr>
               <a:t>trivy</a:t>
             </a:r>
             <a:r>
-              <a:rPr lang="en-US" dirty="0"/>
+              <a:rPr lang="en-US" sz="1300" b="0" dirty="0">
+                <a:solidFill>
+                  <a:srgbClr val="A8D8FF"/>
+                </a:solidFill>
+                <a:latin typeface="Courier New"/>
+              </a:rPr>
               <a:t> image --format table 01-demo-debian</a:t>
             </a:r>
           </a:p>
@@ -8991,28 +10901,47 @@
           </a:p>
           <a:p>
             <a:r>
-              <a:rPr lang="en-US" b="1" dirty="0"/>
+              <a:rPr lang="en-US" sz="1600" b="1" dirty="0">
+                <a:solidFill>
+                  <a:srgbClr val="F7A800"/>
+                </a:solidFill>
+              </a:rPr>
               <a:t>Docker Scout:</a:t>
             </a:r>
           </a:p>
           <a:p>
             <a:pPr lvl="1"/>
             <a:r>
-              <a:rPr lang="en-US" dirty="0"/>
+              <a:rPr lang="en-US" sz="1300" b="0" dirty="0">
+                <a:solidFill>
+                  <a:srgbClr val="A8D8FF"/>
+                </a:solidFill>
+                <a:latin typeface="Courier New"/>
+              </a:rPr>
               <a:t>docker scout cves local://01-demo-debian</a:t>
             </a:r>
           </a:p>
           <a:p>
             <a:pPr lvl="1"/>
             <a:r>
-              <a:rPr lang="en-US" dirty="0"/>
+              <a:rPr lang="en-US" sz="1300" b="0" dirty="0">
+                <a:solidFill>
+                  <a:srgbClr val="A8D8FF"/>
+                </a:solidFill>
+                <a:latin typeface="Courier New"/>
+              </a:rPr>
               <a:t>docker scout cves --only-severity critical,high local://01-demo-debian</a:t>
             </a:r>
           </a:p>
           <a:p>
             <a:pPr lvl="1"/>
             <a:r>
-              <a:rPr lang="en-US" dirty="0"/>
+              <a:rPr lang="en-US" sz="1300" b="0" dirty="0">
+                <a:solidFill>
+                  <a:srgbClr val="A8D8FF"/>
+                </a:solidFill>
+                <a:latin typeface="Courier New"/>
+              </a:rPr>
               <a:t>docker scout recommendations local://01-demo-debian</a:t>
             </a:r>
           </a:p>
@@ -9048,8 +10977,59 @@
               </a:defRPr>
             </a:pPr>
             <a:r>
+              <a:rPr sz="1000" i="1">
+                <a:solidFill>
+                  <a:srgbClr val="607890"/>
+                </a:solidFill>
+              </a:rPr>
               <a:t>Additional implementation details, Dockerfiles, scripts, and speaker notes will be available in the GitHub repository.</a:t>
             </a:r>
+          </a:p>
+        </p:txBody>
+      </p:sp>
+      <p:sp>
+        <p:nvSpPr>
+          <p:cNvPr id="5" name="Rectangle 4"/>
+          <p:cNvSpPr/>
+          <p:nvPr/>
+        </p:nvSpPr>
+        <p:spPr>
+          <a:xfrm>
+            <a:off x="411480" y="1261872"/>
+            <a:ext cx="8321040" cy="40000"/>
+          </a:xfrm>
+          <a:prstGeom prst="rect">
+            <a:avLst/>
+          </a:prstGeom>
+          <a:solidFill>
+            <a:srgbClr val="00BCEB"/>
+          </a:solidFill>
+          <a:ln>
+            <a:solidFill>
+              <a:srgbClr val="1E2A3A"/>
+            </a:solidFill>
+          </a:ln>
+        </p:spPr>
+        <p:style>
+          <a:lnRef idx="1">
+            <a:schemeClr val="accent1"/>
+          </a:lnRef>
+          <a:fillRef idx="3">
+            <a:schemeClr val="accent1"/>
+          </a:fillRef>
+          <a:effectRef idx="2">
+            <a:schemeClr val="accent1"/>
+          </a:effectRef>
+          <a:fontRef idx="minor">
+            <a:schemeClr val="lt1"/>
+          </a:fontRef>
+        </p:style>
+        <p:txBody>
+          <a:bodyPr rtlCol="0" anchor="ctr"/>
+          <a:lstStyle/>
+          <a:p>
+            <a:pPr algn="ctr"/>
+            <a:endParaRPr/>
           </a:p>
         </p:txBody>
       </p:sp>
@@ -9064,6 +11044,14 @@
 <file path=ppt/slides/slide23.xml><?xml version="1.0" encoding="utf-8"?>
 <p:sld xmlns:a="http://schemas.openxmlformats.org/drawingml/2006/main" xmlns:r="http://schemas.openxmlformats.org/officeDocument/2006/relationships" xmlns:p="http://schemas.openxmlformats.org/presentationml/2006/main">
   <p:cSld>
+    <p:bg>
+      <p:bgPr>
+        <a:solidFill>
+          <a:srgbClr val="1E2A3A"/>
+        </a:solidFill>
+        <a:effectLst/>
+      </p:bgPr>
+    </p:bg>
     <p:spTree>
       <p:nvGrpSpPr>
         <p:cNvPr id="1" name=""/>
@@ -9101,11 +11089,19 @@
           <a:lstStyle/>
           <a:p>
             <a:r>
-              <a:rPr dirty="0" err="1"/>
+              <a:rPr sz="2800" b="1" dirty="0" err="1">
+                <a:solidFill>
+                  <a:srgbClr val="FFFFFF"/>
+                </a:solidFill>
+              </a:rPr>
               <a:t>Trivy</a:t>
             </a:r>
             <a:r>
-              <a:rPr dirty="0"/>
+              <a:rPr sz="2800" b="1" dirty="0">
+                <a:solidFill>
+                  <a:srgbClr val="FFFFFF"/>
+                </a:solidFill>
+              </a:rPr>
               <a:t> Vulnerability Scan Results</a:t>
             </a:r>
           </a:p>
@@ -9141,6 +11137,11 @@
               </a:defRPr>
             </a:pPr>
             <a:r>
+              <a:rPr sz="1000" i="1">
+                <a:solidFill>
+                  <a:srgbClr val="607890"/>
+                </a:solidFill>
+              </a:rPr>
               <a:t>Additional implementation details, Dockerfiles, scripts, and speaker notes will be available in the GitHub repository.</a:t>
             </a:r>
           </a:p>
@@ -11208,9 +13209,59 @@
           <a:lstStyle/>
           <a:p>
             <a:r>
-              <a:rPr lang="en-US" dirty="0"/>
+              <a:rPr lang="en-US" sz="1000" i="1" dirty="0">
+                <a:solidFill>
+                  <a:srgbClr val="607890"/>
+                </a:solidFill>
+              </a:rPr>
               <a:t>Scans were done on 2026-06-04</a:t>
             </a:r>
+          </a:p>
+        </p:txBody>
+      </p:sp>
+      <p:sp>
+        <p:nvSpPr>
+          <p:cNvPr id="8" name="Rectangle 7"/>
+          <p:cNvSpPr/>
+          <p:nvPr/>
+        </p:nvSpPr>
+        <p:spPr>
+          <a:xfrm>
+            <a:off x="411480" y="1261872"/>
+            <a:ext cx="8321040" cy="40000"/>
+          </a:xfrm>
+          <a:prstGeom prst="rect">
+            <a:avLst/>
+          </a:prstGeom>
+          <a:solidFill>
+            <a:srgbClr val="00BCEB"/>
+          </a:solidFill>
+          <a:ln>
+            <a:solidFill>
+              <a:srgbClr val="1E2A3A"/>
+            </a:solidFill>
+          </a:ln>
+        </p:spPr>
+        <p:style>
+          <a:lnRef idx="1">
+            <a:schemeClr val="accent1"/>
+          </a:lnRef>
+          <a:fillRef idx="3">
+            <a:schemeClr val="accent1"/>
+          </a:fillRef>
+          <a:effectRef idx="2">
+            <a:schemeClr val="accent1"/>
+          </a:effectRef>
+          <a:fontRef idx="minor">
+            <a:schemeClr val="lt1"/>
+          </a:fontRef>
+        </p:style>
+        <p:txBody>
+          <a:bodyPr rtlCol="0" anchor="ctr"/>
+          <a:lstStyle/>
+          <a:p>
+            <a:pPr algn="ctr"/>
+            <a:endParaRPr/>
           </a:p>
         </p:txBody>
       </p:sp>
@@ -11225,6 +13276,14 @@
 <file path=ppt/slides/slide24.xml><?xml version="1.0" encoding="utf-8"?>
 <p:sld xmlns:a="http://schemas.openxmlformats.org/drawingml/2006/main" xmlns:r="http://schemas.openxmlformats.org/officeDocument/2006/relationships" xmlns:p="http://schemas.openxmlformats.org/presentationml/2006/main">
   <p:cSld>
+    <p:bg>
+      <p:bgPr>
+        <a:solidFill>
+          <a:srgbClr val="1E2A3A"/>
+        </a:solidFill>
+        <a:effectLst/>
+      </p:bgPr>
+    </p:bg>
     <p:spTree>
       <p:nvGrpSpPr>
         <p:cNvPr id="1" name=""/>
@@ -11262,15 +13321,27 @@
           <a:lstStyle/>
           <a:p>
             <a:r>
-              <a:rPr dirty="0"/>
+              <a:rPr sz="2800" b="1" dirty="0">
+                <a:solidFill>
+                  <a:srgbClr val="FFFFFF"/>
+                </a:solidFill>
+              </a:rPr>
               <a:t>Docker Scout Vulnerability Scan</a:t>
             </a:r>
             <a:r>
-              <a:rPr lang="en-US" dirty="0"/>
+              <a:rPr lang="en-US" sz="2800" b="1" dirty="0">
+                <a:solidFill>
+                  <a:srgbClr val="FFFFFF"/>
+                </a:solidFill>
+              </a:rPr>
               <a:t> </a:t>
             </a:r>
             <a:r>
-              <a:rPr dirty="0"/>
+              <a:rPr sz="2800" b="1" dirty="0">
+                <a:solidFill>
+                  <a:srgbClr val="FFFFFF"/>
+                </a:solidFill>
+              </a:rPr>
               <a:t>Results</a:t>
             </a:r>
           </a:p>
@@ -11306,6 +13377,11 @@
               </a:defRPr>
             </a:pPr>
             <a:r>
+              <a:rPr sz="1000" i="1">
+                <a:solidFill>
+                  <a:srgbClr val="607890"/>
+                </a:solidFill>
+              </a:rPr>
               <a:t>Additional implementation details, Dockerfiles, scripts, and speaker notes will be available in the GitHub repository.</a:t>
             </a:r>
           </a:p>
@@ -13375,9 +15451,59 @@
           <a:lstStyle/>
           <a:p>
             <a:r>
-              <a:rPr lang="en-US" dirty="0"/>
+              <a:rPr lang="en-US" sz="1000" i="1" dirty="0">
+                <a:solidFill>
+                  <a:srgbClr val="607890"/>
+                </a:solidFill>
+              </a:rPr>
               <a:t>Scans were done on 2026-06-04</a:t>
             </a:r>
+          </a:p>
+        </p:txBody>
+      </p:sp>
+      <p:sp>
+        <p:nvSpPr>
+          <p:cNvPr id="7" name="Rectangle 6"/>
+          <p:cNvSpPr/>
+          <p:nvPr/>
+        </p:nvSpPr>
+        <p:spPr>
+          <a:xfrm>
+            <a:off x="411480" y="1261872"/>
+            <a:ext cx="8321040" cy="40000"/>
+          </a:xfrm>
+          <a:prstGeom prst="rect">
+            <a:avLst/>
+          </a:prstGeom>
+          <a:solidFill>
+            <a:srgbClr val="00BCEB"/>
+          </a:solidFill>
+          <a:ln>
+            <a:solidFill>
+              <a:srgbClr val="1E2A3A"/>
+            </a:solidFill>
+          </a:ln>
+        </p:spPr>
+        <p:style>
+          <a:lnRef idx="1">
+            <a:schemeClr val="accent1"/>
+          </a:lnRef>
+          <a:fillRef idx="3">
+            <a:schemeClr val="accent1"/>
+          </a:fillRef>
+          <a:effectRef idx="2">
+            <a:schemeClr val="accent1"/>
+          </a:effectRef>
+          <a:fontRef idx="minor">
+            <a:schemeClr val="lt1"/>
+          </a:fontRef>
+        </p:style>
+        <p:txBody>
+          <a:bodyPr rtlCol="0" anchor="ctr"/>
+          <a:lstStyle/>
+          <a:p>
+            <a:pPr algn="ctr"/>
+            <a:endParaRPr/>
           </a:p>
         </p:txBody>
       </p:sp>
@@ -13392,6 +15518,14 @@
 <file path=ppt/slides/slide25.xml><?xml version="1.0" encoding="utf-8"?>
 <p:sld xmlns:a="http://schemas.openxmlformats.org/drawingml/2006/main" xmlns:r="http://schemas.openxmlformats.org/officeDocument/2006/relationships" xmlns:p="http://schemas.openxmlformats.org/presentationml/2006/main">
   <p:cSld>
+    <p:bg>
+      <p:bgPr>
+        <a:solidFill>
+          <a:srgbClr val="1E2A3A"/>
+        </a:solidFill>
+        <a:effectLst/>
+      </p:bgPr>
+    </p:bg>
     <p:spTree>
       <p:nvGrpSpPr>
         <p:cNvPr id="1" name=""/>
@@ -13424,6 +15558,11 @@
           <a:lstStyle/>
           <a:p>
             <a:r>
+              <a:rPr sz="2800" b="1">
+                <a:solidFill>
+                  <a:srgbClr val="FFFFFF"/>
+                </a:solidFill>
+              </a:rPr>
               <a:t>Chainguard Images: Docker Scout CVE Detail</a:t>
             </a:r>
           </a:p>
@@ -14443,6 +16582,11 @@
               </a:defRPr>
             </a:pPr>
             <a:r>
+              <a:rPr sz="1000" i="1">
+                <a:solidFill>
+                  <a:srgbClr val="607890"/>
+                </a:solidFill>
+              </a:rPr>
               <a:t>Additional implementation details, Dockerfiles, scripts, and speaker notes will be available in the GitHub repository.</a:t>
             </a:r>
           </a:p>
@@ -14477,9 +16621,59 @@
           <a:lstStyle/>
           <a:p>
             <a:r>
-              <a:rPr lang="en-US" dirty="0"/>
+              <a:rPr lang="en-US" sz="1000" i="1" dirty="0">
+                <a:solidFill>
+                  <a:srgbClr val="607890"/>
+                </a:solidFill>
+              </a:rPr>
               <a:t>Scans were done on 2026-06-04</a:t>
             </a:r>
+          </a:p>
+        </p:txBody>
+      </p:sp>
+      <p:sp>
+        <p:nvSpPr>
+          <p:cNvPr id="7" name="Rectangle 6"/>
+          <p:cNvSpPr/>
+          <p:nvPr/>
+        </p:nvSpPr>
+        <p:spPr>
+          <a:xfrm>
+            <a:off x="411480" y="1261872"/>
+            <a:ext cx="8321040" cy="40000"/>
+          </a:xfrm>
+          <a:prstGeom prst="rect">
+            <a:avLst/>
+          </a:prstGeom>
+          <a:solidFill>
+            <a:srgbClr val="00BCEB"/>
+          </a:solidFill>
+          <a:ln>
+            <a:solidFill>
+              <a:srgbClr val="1E2A3A"/>
+            </a:solidFill>
+          </a:ln>
+        </p:spPr>
+        <p:style>
+          <a:lnRef idx="1">
+            <a:schemeClr val="accent1"/>
+          </a:lnRef>
+          <a:fillRef idx="3">
+            <a:schemeClr val="accent1"/>
+          </a:fillRef>
+          <a:effectRef idx="2">
+            <a:schemeClr val="accent1"/>
+          </a:effectRef>
+          <a:fontRef idx="minor">
+            <a:schemeClr val="lt1"/>
+          </a:fontRef>
+        </p:style>
+        <p:txBody>
+          <a:bodyPr rtlCol="0" anchor="ctr"/>
+          <a:lstStyle/>
+          <a:p>
+            <a:pPr algn="ctr"/>
+            <a:endParaRPr/>
           </a:p>
         </p:txBody>
       </p:sp>
@@ -14494,6 +16688,14 @@
 <file path=ppt/slides/slide26.xml><?xml version="1.0" encoding="utf-8"?>
 <p:sld xmlns:a="http://schemas.openxmlformats.org/drawingml/2006/main" xmlns:r="http://schemas.openxmlformats.org/officeDocument/2006/relationships" xmlns:p="http://schemas.openxmlformats.org/presentationml/2006/main">
   <p:cSld>
+    <p:bg>
+      <p:bgPr>
+        <a:solidFill>
+          <a:srgbClr val="1E2A3A"/>
+        </a:solidFill>
+        <a:effectLst/>
+      </p:bgPr>
+    </p:bg>
     <p:spTree>
       <p:nvGrpSpPr>
         <p:cNvPr id="1" name=""/>
@@ -14524,6 +16726,11 @@
           <a:lstStyle/>
           <a:p>
             <a:r>
+              <a:rPr sz="2800" b="1">
+                <a:solidFill>
+                  <a:srgbClr val="FFFFFF"/>
+                </a:solidFill>
+              </a:rPr>
               <a:t>Distroless Is Not a Silver Bullet</a:t>
             </a:r>
           </a:p>
@@ -14547,56 +16754,88 @@
           <a:lstStyle/>
           <a:p>
             <a:r>
-              <a:rPr lang="en-US" dirty="0"/>
+              <a:rPr lang="en-US" sz="1600" dirty="0">
+                <a:solidFill>
+                  <a:srgbClr val="D0D8E0"/>
+                </a:solidFill>
+              </a:rPr>
               <a:t>Security:</a:t>
             </a:r>
           </a:p>
           <a:p>
             <a:pPr lvl="1"/>
             <a:r>
-              <a:rPr dirty="0"/>
+              <a:rPr sz="1600" dirty="0">
+                <a:solidFill>
+                  <a:srgbClr val="D0D8E0"/>
+                </a:solidFill>
+              </a:rPr>
               <a:t>Does not prevent compromise</a:t>
             </a:r>
           </a:p>
           <a:p>
             <a:pPr lvl="1"/>
             <a:r>
-              <a:rPr dirty="0"/>
+              <a:rPr sz="1600" dirty="0">
+                <a:solidFill>
+                  <a:srgbClr val="D0D8E0"/>
+                </a:solidFill>
+              </a:rPr>
               <a:t>Does not eliminate vulnerabilities</a:t>
             </a:r>
           </a:p>
           <a:p>
             <a:pPr lvl="1"/>
             <a:r>
-              <a:rPr dirty="0"/>
+              <a:rPr sz="1600" dirty="0">
+                <a:solidFill>
+                  <a:srgbClr val="D0D8E0"/>
+                </a:solidFill>
+              </a:rPr>
               <a:t>Should be part of defense in depth</a:t>
             </a:r>
             <a:endParaRPr lang="en-US" dirty="0"/>
           </a:p>
           <a:p>
             <a:r>
-              <a:rPr lang="en-US" dirty="0"/>
+              <a:rPr lang="en-US" sz="1600" dirty="0">
+                <a:solidFill>
+                  <a:srgbClr val="D0D8E0"/>
+                </a:solidFill>
+              </a:rPr>
               <a:t>Operational Tradeoffs:</a:t>
             </a:r>
           </a:p>
           <a:p>
             <a:pPr lvl="1"/>
             <a:r>
-              <a:rPr lang="en-US" dirty="0"/>
+              <a:rPr lang="en-US" sz="1600" dirty="0">
+                <a:solidFill>
+                  <a:srgbClr val="D0D8E0"/>
+                </a:solidFill>
+              </a:rPr>
               <a:t>Harder debugging</a:t>
             </a:r>
           </a:p>
           <a:p>
             <a:pPr lvl="1"/>
             <a:r>
-              <a:rPr lang="en-US" dirty="0"/>
+              <a:rPr lang="en-US" sz="1600" dirty="0">
+                <a:solidFill>
+                  <a:srgbClr val="D0D8E0"/>
+                </a:solidFill>
+              </a:rPr>
               <a:t>Different troubleshooting workflows</a:t>
             </a:r>
           </a:p>
           <a:p>
             <a:pPr lvl="1"/>
             <a:r>
-              <a:rPr lang="en-US" dirty="0"/>
+              <a:rPr lang="en-US" sz="1600" dirty="0">
+                <a:solidFill>
+                  <a:srgbClr val="D0D8E0"/>
+                </a:solidFill>
+              </a:rPr>
               <a:t>Compatibility edge cases</a:t>
             </a:r>
             <a:endParaRPr dirty="0"/>
@@ -14633,8 +16872,59 @@
               </a:defRPr>
             </a:pPr>
             <a:r>
+              <a:rPr sz="1000" i="1">
+                <a:solidFill>
+                  <a:srgbClr val="607890"/>
+                </a:solidFill>
+              </a:rPr>
               <a:t>Additional implementation details, Dockerfiles, scripts, and speaker notes will be available in the GitHub repository.</a:t>
             </a:r>
+          </a:p>
+        </p:txBody>
+      </p:sp>
+      <p:sp>
+        <p:nvSpPr>
+          <p:cNvPr id="5" name="Rectangle 4"/>
+          <p:cNvSpPr/>
+          <p:nvPr/>
+        </p:nvSpPr>
+        <p:spPr>
+          <a:xfrm>
+            <a:off x="411480" y="1261872"/>
+            <a:ext cx="8321040" cy="40000"/>
+          </a:xfrm>
+          <a:prstGeom prst="rect">
+            <a:avLst/>
+          </a:prstGeom>
+          <a:solidFill>
+            <a:srgbClr val="00BCEB"/>
+          </a:solidFill>
+          <a:ln>
+            <a:solidFill>
+              <a:srgbClr val="1E2A3A"/>
+            </a:solidFill>
+          </a:ln>
+        </p:spPr>
+        <p:style>
+          <a:lnRef idx="1">
+            <a:schemeClr val="accent1"/>
+          </a:lnRef>
+          <a:fillRef idx="3">
+            <a:schemeClr val="accent1"/>
+          </a:fillRef>
+          <a:effectRef idx="2">
+            <a:schemeClr val="accent1"/>
+          </a:effectRef>
+          <a:fontRef idx="minor">
+            <a:schemeClr val="lt1"/>
+          </a:fontRef>
+        </p:style>
+        <p:txBody>
+          <a:bodyPr rtlCol="0" anchor="ctr"/>
+          <a:lstStyle/>
+          <a:p>
+            <a:pPr algn="ctr"/>
+            <a:endParaRPr/>
           </a:p>
         </p:txBody>
       </p:sp>
@@ -14649,6 +16939,14 @@
 <file path=ppt/slides/slide27.xml><?xml version="1.0" encoding="utf-8"?>
 <p:sld xmlns:a="http://schemas.openxmlformats.org/drawingml/2006/main" xmlns:r="http://schemas.openxmlformats.org/officeDocument/2006/relationships" xmlns:p="http://schemas.openxmlformats.org/presentationml/2006/main">
   <p:cSld>
+    <p:bg>
+      <p:bgPr>
+        <a:solidFill>
+          <a:srgbClr val="1E2A3A"/>
+        </a:solidFill>
+        <a:effectLst/>
+      </p:bgPr>
+    </p:bg>
     <p:spTree>
       <p:nvGrpSpPr>
         <p:cNvPr id="1" name=""/>
@@ -14679,6 +16977,11 @@
           <a:lstStyle/>
           <a:p>
             <a:r>
+              <a:rPr sz="2800" b="1">
+                <a:solidFill>
+                  <a:srgbClr val="FFFFFF"/>
+                </a:solidFill>
+              </a:rPr>
               <a:t>Debugging Distroless Containers</a:t>
             </a:r>
           </a:p>
@@ -14700,16 +17003,31 @@
           <a:lstStyle/>
           <a:p>
             <a:r>
+              <a:rPr sz="1600">
+                <a:solidFill>
+                  <a:srgbClr val="D0D8E0"/>
+                </a:solidFill>
+              </a:rPr>
               <a:t>kubectl debug</a:t>
             </a:r>
           </a:p>
           <a:p>
             <a:r>
+              <a:rPr sz="1600">
+                <a:solidFill>
+                  <a:srgbClr val="D0D8E0"/>
+                </a:solidFill>
+              </a:rPr>
               <a:t>Ephemeral containers</a:t>
             </a:r>
           </a:p>
           <a:p>
             <a:r>
+              <a:rPr sz="1600">
+                <a:solidFill>
+                  <a:srgbClr val="D0D8E0"/>
+                </a:solidFill>
+              </a:rPr>
               <a:t>Separate debug images</a:t>
             </a:r>
           </a:p>
@@ -14745,8 +17063,59 @@
               </a:defRPr>
             </a:pPr>
             <a:r>
+              <a:rPr sz="1000" i="1">
+                <a:solidFill>
+                  <a:srgbClr val="607890"/>
+                </a:solidFill>
+              </a:rPr>
               <a:t>Additional implementation details, Dockerfiles, scripts, and speaker notes will be available in the GitHub repository.</a:t>
             </a:r>
+          </a:p>
+        </p:txBody>
+      </p:sp>
+      <p:sp>
+        <p:nvSpPr>
+          <p:cNvPr id="5" name="Rectangle 4"/>
+          <p:cNvSpPr/>
+          <p:nvPr/>
+        </p:nvSpPr>
+        <p:spPr>
+          <a:xfrm>
+            <a:off x="411480" y="1261872"/>
+            <a:ext cx="8321040" cy="40000"/>
+          </a:xfrm>
+          <a:prstGeom prst="rect">
+            <a:avLst/>
+          </a:prstGeom>
+          <a:solidFill>
+            <a:srgbClr val="00BCEB"/>
+          </a:solidFill>
+          <a:ln>
+            <a:solidFill>
+              <a:srgbClr val="1E2A3A"/>
+            </a:solidFill>
+          </a:ln>
+        </p:spPr>
+        <p:style>
+          <a:lnRef idx="1">
+            <a:schemeClr val="accent1"/>
+          </a:lnRef>
+          <a:fillRef idx="3">
+            <a:schemeClr val="accent1"/>
+          </a:fillRef>
+          <a:effectRef idx="2">
+            <a:schemeClr val="accent1"/>
+          </a:effectRef>
+          <a:fontRef idx="minor">
+            <a:schemeClr val="lt1"/>
+          </a:fontRef>
+        </p:style>
+        <p:txBody>
+          <a:bodyPr rtlCol="0" anchor="ctr"/>
+          <a:lstStyle/>
+          <a:p>
+            <a:pPr algn="ctr"/>
+            <a:endParaRPr/>
           </a:p>
         </p:txBody>
       </p:sp>
@@ -14761,6 +17130,14 @@
 <file path=ppt/slides/slide28.xml><?xml version="1.0" encoding="utf-8"?>
 <p:sld xmlns:a="http://schemas.openxmlformats.org/drawingml/2006/main" xmlns:r="http://schemas.openxmlformats.org/officeDocument/2006/relationships" xmlns:p="http://schemas.openxmlformats.org/presentationml/2006/main">
   <p:cSld>
+    <p:bg>
+      <p:bgPr>
+        <a:solidFill>
+          <a:srgbClr val="1E2A3A"/>
+        </a:solidFill>
+        <a:effectLst/>
+      </p:bgPr>
+    </p:bg>
     <p:spTree>
       <p:nvGrpSpPr>
         <p:cNvPr id="1" name=""/>
@@ -14791,6 +17168,11 @@
           <a:lstStyle/>
           <a:p>
             <a:r>
+              <a:rPr sz="2800" b="1">
+                <a:solidFill>
+                  <a:srgbClr val="FFFFFF"/>
+                </a:solidFill>
+              </a:rPr>
               <a:t>When You Actually Need a Shell</a:t>
             </a:r>
           </a:p>
@@ -14812,11 +17194,21 @@
           <a:lstStyle/>
           <a:p>
             <a:r>
+              <a:rPr sz="1600">
+                <a:solidFill>
+                  <a:srgbClr val="D0D8E0"/>
+                </a:solidFill>
+              </a:rPr>
               <a:t>Valid operational cases exist.</a:t>
             </a:r>
           </a:p>
           <a:p>
             <a:r>
+              <a:rPr sz="1600">
+                <a:solidFill>
+                  <a:srgbClr val="D0D8E0"/>
+                </a:solidFill>
+              </a:rPr>
               <a:t>Use dedicated debug images rather than bloating production runtimes.</a:t>
             </a:r>
           </a:p>
@@ -14852,8 +17244,59 @@
               </a:defRPr>
             </a:pPr>
             <a:r>
+              <a:rPr sz="1000" i="1">
+                <a:solidFill>
+                  <a:srgbClr val="607890"/>
+                </a:solidFill>
+              </a:rPr>
               <a:t>Additional implementation details, Dockerfiles, scripts, and speaker notes will be available in the GitHub repository.</a:t>
             </a:r>
+          </a:p>
+        </p:txBody>
+      </p:sp>
+      <p:sp>
+        <p:nvSpPr>
+          <p:cNvPr id="5" name="Rectangle 4"/>
+          <p:cNvSpPr/>
+          <p:nvPr/>
+        </p:nvSpPr>
+        <p:spPr>
+          <a:xfrm>
+            <a:off x="411480" y="1261872"/>
+            <a:ext cx="8321040" cy="40000"/>
+          </a:xfrm>
+          <a:prstGeom prst="rect">
+            <a:avLst/>
+          </a:prstGeom>
+          <a:solidFill>
+            <a:srgbClr val="00BCEB"/>
+          </a:solidFill>
+          <a:ln>
+            <a:solidFill>
+              <a:srgbClr val="1E2A3A"/>
+            </a:solidFill>
+          </a:ln>
+        </p:spPr>
+        <p:style>
+          <a:lnRef idx="1">
+            <a:schemeClr val="accent1"/>
+          </a:lnRef>
+          <a:fillRef idx="3">
+            <a:schemeClr val="accent1"/>
+          </a:fillRef>
+          <a:effectRef idx="2">
+            <a:schemeClr val="accent1"/>
+          </a:effectRef>
+          <a:fontRef idx="minor">
+            <a:schemeClr val="lt1"/>
+          </a:fontRef>
+        </p:style>
+        <p:txBody>
+          <a:bodyPr rtlCol="0" anchor="ctr"/>
+          <a:lstStyle/>
+          <a:p>
+            <a:pPr algn="ctr"/>
+            <a:endParaRPr/>
           </a:p>
         </p:txBody>
       </p:sp>
@@ -14868,6 +17311,14 @@
 <file path=ppt/slides/slide29.xml><?xml version="1.0" encoding="utf-8"?>
 <p:sld xmlns:a="http://schemas.openxmlformats.org/drawingml/2006/main" xmlns:r="http://schemas.openxmlformats.org/officeDocument/2006/relationships" xmlns:p="http://schemas.openxmlformats.org/presentationml/2006/main">
   <p:cSld>
+    <p:bg>
+      <p:bgPr>
+        <a:solidFill>
+          <a:srgbClr val="1E2A3A"/>
+        </a:solidFill>
+        <a:effectLst/>
+      </p:bgPr>
+    </p:bg>
     <p:spTree>
       <p:nvGrpSpPr>
         <p:cNvPr id="1" name=""/>
@@ -14900,6 +17351,11 @@
           <a:lstStyle/>
           <a:p>
             <a:r>
+              <a:rPr sz="2800" b="1">
+                <a:solidFill>
+                  <a:srgbClr val="FFFFFF"/>
+                </a:solidFill>
+              </a:rPr>
               <a:t>Container Hardening Beyond Distroless</a:t>
             </a:r>
           </a:p>
@@ -14921,21 +17377,41 @@
           <a:lstStyle/>
           <a:p>
             <a:r>
+              <a:rPr sz="1600">
+                <a:solidFill>
+                  <a:srgbClr val="D0D8E0"/>
+                </a:solidFill>
+              </a:rPr>
               <a:t>Run as non-root</a:t>
             </a:r>
           </a:p>
           <a:p>
             <a:r>
+              <a:rPr sz="1600">
+                <a:solidFill>
+                  <a:srgbClr val="D0D8E0"/>
+                </a:solidFill>
+              </a:rPr>
               <a:t>Read-only filesystems</a:t>
             </a:r>
           </a:p>
           <a:p>
             <a:r>
+              <a:rPr sz="1600">
+                <a:solidFill>
+                  <a:srgbClr val="D0D8E0"/>
+                </a:solidFill>
+              </a:rPr>
               <a:t>Drop capabilities</a:t>
             </a:r>
           </a:p>
           <a:p>
             <a:r>
+              <a:rPr sz="1600">
+                <a:solidFill>
+                  <a:srgbClr val="D0D8E0"/>
+                </a:solidFill>
+              </a:rPr>
               <a:t>Use seccomp/AppArmor</a:t>
             </a:r>
           </a:p>
@@ -14971,8 +17447,59 @@
               </a:defRPr>
             </a:pPr>
             <a:r>
+              <a:rPr sz="1000" i="1">
+                <a:solidFill>
+                  <a:srgbClr val="607890"/>
+                </a:solidFill>
+              </a:rPr>
               <a:t>Additional implementation details, Dockerfiles, scripts, and speaker notes will be available in the GitHub repository.</a:t>
             </a:r>
+          </a:p>
+        </p:txBody>
+      </p:sp>
+      <p:sp>
+        <p:nvSpPr>
+          <p:cNvPr id="5" name="Rectangle 4"/>
+          <p:cNvSpPr/>
+          <p:nvPr/>
+        </p:nvSpPr>
+        <p:spPr>
+          <a:xfrm>
+            <a:off x="411480" y="1261872"/>
+            <a:ext cx="8321040" cy="40000"/>
+          </a:xfrm>
+          <a:prstGeom prst="rect">
+            <a:avLst/>
+          </a:prstGeom>
+          <a:solidFill>
+            <a:srgbClr val="00BCEB"/>
+          </a:solidFill>
+          <a:ln>
+            <a:solidFill>
+              <a:srgbClr val="1E2A3A"/>
+            </a:solidFill>
+          </a:ln>
+        </p:spPr>
+        <p:style>
+          <a:lnRef idx="1">
+            <a:schemeClr val="accent1"/>
+          </a:lnRef>
+          <a:fillRef idx="3">
+            <a:schemeClr val="accent1"/>
+          </a:fillRef>
+          <a:effectRef idx="2">
+            <a:schemeClr val="accent1"/>
+          </a:effectRef>
+          <a:fontRef idx="minor">
+            <a:schemeClr val="lt1"/>
+          </a:fontRef>
+        </p:style>
+        <p:txBody>
+          <a:bodyPr rtlCol="0" anchor="ctr"/>
+          <a:lstStyle/>
+          <a:p>
+            <a:pPr algn="ctr"/>
+            <a:endParaRPr/>
           </a:p>
         </p:txBody>
       </p:sp>
@@ -14990,7 +17517,7 @@
     <p:bg>
       <p:bgPr>
         <a:solidFill>
-          <a:schemeClr val="bg1"/>
+          <a:srgbClr val="1E2A3A"/>
         </a:solidFill>
         <a:effectLst/>
       </p:bgPr>
@@ -15097,7 +17624,11 @@
               </a:lnSpc>
             </a:pPr>
             <a:r>
-              <a:rPr lang="en-US" sz="3600"/>
+              <a:rPr lang="en-US" sz="2800" b="1">
+                <a:solidFill>
+                  <a:srgbClr val="FFFFFF"/>
+                </a:solidFill>
+              </a:rPr>
               <a:t>What Attackers Want Inside Containers</a:t>
             </a:r>
           </a:p>
@@ -15379,25 +17910,41 @@
           <a:lstStyle/>
           <a:p>
             <a:r>
-              <a:rPr lang="en-US" sz="1900"/>
+              <a:rPr lang="en-US" sz="1600">
+                <a:solidFill>
+                  <a:srgbClr val="D0D8E0"/>
+                </a:solidFill>
+              </a:rPr>
               <a:t>/bin/sh or bash</a:t>
             </a:r>
           </a:p>
           <a:p>
             <a:r>
-              <a:rPr lang="en-US" sz="1900"/>
+              <a:rPr lang="en-US" sz="1600">
+                <a:solidFill>
+                  <a:srgbClr val="D0D8E0"/>
+                </a:solidFill>
+              </a:rPr>
               <a:t>curl/wget</a:t>
             </a:r>
           </a:p>
           <a:p>
             <a:r>
-              <a:rPr lang="en-US" sz="1900"/>
+              <a:rPr lang="en-US" sz="1600">
+                <a:solidFill>
+                  <a:srgbClr val="D0D8E0"/>
+                </a:solidFill>
+              </a:rPr>
               <a:t>Package managers</a:t>
             </a:r>
           </a:p>
           <a:p>
             <a:r>
-              <a:rPr lang="en-US" sz="1900"/>
+              <a:rPr lang="en-US" sz="1600">
+                <a:solidFill>
+                  <a:srgbClr val="D0D8E0"/>
+                </a:solidFill>
+              </a:rPr>
               <a:t>Interpreters and debugging utilities</a:t>
             </a:r>
           </a:p>
@@ -15546,6 +18093,52 @@
           </a:custGeom>
         </p:spPr>
       </p:pic>
+      <p:sp>
+        <p:nvSpPr>
+          <p:cNvPr id="13" name="Rectangle 12"/>
+          <p:cNvSpPr/>
+          <p:nvPr/>
+        </p:nvSpPr>
+        <p:spPr>
+          <a:xfrm>
+            <a:off x="411480" y="1261872"/>
+            <a:ext cx="8321040" cy="40000"/>
+          </a:xfrm>
+          <a:prstGeom prst="rect">
+            <a:avLst/>
+          </a:prstGeom>
+          <a:solidFill>
+            <a:srgbClr val="00BCEB"/>
+          </a:solidFill>
+          <a:ln>
+            <a:solidFill>
+              <a:srgbClr val="1E2A3A"/>
+            </a:solidFill>
+          </a:ln>
+        </p:spPr>
+        <p:style>
+          <a:lnRef idx="1">
+            <a:schemeClr val="accent1"/>
+          </a:lnRef>
+          <a:fillRef idx="3">
+            <a:schemeClr val="accent1"/>
+          </a:fillRef>
+          <a:effectRef idx="2">
+            <a:schemeClr val="accent1"/>
+          </a:effectRef>
+          <a:fontRef idx="minor">
+            <a:schemeClr val="lt1"/>
+          </a:fontRef>
+        </p:style>
+        <p:txBody>
+          <a:bodyPr rtlCol="0" anchor="ctr"/>
+          <a:lstStyle/>
+          <a:p>
+            <a:pPr algn="ctr"/>
+            <a:endParaRPr/>
+          </a:p>
+        </p:txBody>
+      </p:sp>
     </p:spTree>
   </p:cSld>
   <p:clrMapOvr>
@@ -15557,6 +18150,14 @@
 <file path=ppt/slides/slide30.xml><?xml version="1.0" encoding="utf-8"?>
 <p:sld xmlns:a="http://schemas.openxmlformats.org/drawingml/2006/main" xmlns:r="http://schemas.openxmlformats.org/officeDocument/2006/relationships" xmlns:p="http://schemas.openxmlformats.org/presentationml/2006/main">
   <p:cSld>
+    <p:bg>
+      <p:bgPr>
+        <a:solidFill>
+          <a:srgbClr val="1E2A3A"/>
+        </a:solidFill>
+        <a:effectLst/>
+      </p:bgPr>
+    </p:bg>
     <p:spTree>
       <p:nvGrpSpPr>
         <p:cNvPr id="1" name=""/>
@@ -15589,6 +18190,11 @@
           <a:lstStyle/>
           <a:p>
             <a:r>
+              <a:rPr sz="2800" b="1">
+                <a:solidFill>
+                  <a:srgbClr val="FFFFFF"/>
+                </a:solidFill>
+              </a:rPr>
               <a:t>Recommended Architecture Patterns</a:t>
             </a:r>
           </a:p>
@@ -15610,21 +18216,41 @@
           <a:lstStyle/>
           <a:p>
             <a:r>
+              <a:rPr sz="1600">
+                <a:solidFill>
+                  <a:srgbClr val="D0D8E0"/>
+                </a:solidFill>
+              </a:rPr>
               <a:t>Multi-stage builds</a:t>
             </a:r>
           </a:p>
           <a:p>
             <a:r>
+              <a:rPr sz="1600">
+                <a:solidFill>
+                  <a:srgbClr val="D0D8E0"/>
+                </a:solidFill>
+              </a:rPr>
               <a:t>Minimal runtime images</a:t>
             </a:r>
           </a:p>
           <a:p>
             <a:r>
+              <a:rPr sz="1600">
+                <a:solidFill>
+                  <a:srgbClr val="D0D8E0"/>
+                </a:solidFill>
+              </a:rPr>
               <a:t>Signed images</a:t>
             </a:r>
           </a:p>
           <a:p>
             <a:r>
+              <a:rPr sz="1600">
+                <a:solidFill>
+                  <a:srgbClr val="D0D8E0"/>
+                </a:solidFill>
+              </a:rPr>
               <a:t>CI/CD scanning and SBOM generation</a:t>
             </a:r>
           </a:p>
@@ -15660,8 +18286,59 @@
               </a:defRPr>
             </a:pPr>
             <a:r>
+              <a:rPr sz="1000" i="1">
+                <a:solidFill>
+                  <a:srgbClr val="607890"/>
+                </a:solidFill>
+              </a:rPr>
               <a:t>Additional implementation details, Dockerfiles, scripts, and speaker notes will be available in the GitHub repository.</a:t>
             </a:r>
+          </a:p>
+        </p:txBody>
+      </p:sp>
+      <p:sp>
+        <p:nvSpPr>
+          <p:cNvPr id="5" name="Rectangle 4"/>
+          <p:cNvSpPr/>
+          <p:nvPr/>
+        </p:nvSpPr>
+        <p:spPr>
+          <a:xfrm>
+            <a:off x="411480" y="1261872"/>
+            <a:ext cx="8321040" cy="40000"/>
+          </a:xfrm>
+          <a:prstGeom prst="rect">
+            <a:avLst/>
+          </a:prstGeom>
+          <a:solidFill>
+            <a:srgbClr val="00BCEB"/>
+          </a:solidFill>
+          <a:ln>
+            <a:solidFill>
+              <a:srgbClr val="1E2A3A"/>
+            </a:solidFill>
+          </a:ln>
+        </p:spPr>
+        <p:style>
+          <a:lnRef idx="1">
+            <a:schemeClr val="accent1"/>
+          </a:lnRef>
+          <a:fillRef idx="3">
+            <a:schemeClr val="accent1"/>
+          </a:fillRef>
+          <a:effectRef idx="2">
+            <a:schemeClr val="accent1"/>
+          </a:effectRef>
+          <a:fontRef idx="minor">
+            <a:schemeClr val="lt1"/>
+          </a:fontRef>
+        </p:style>
+        <p:txBody>
+          <a:bodyPr rtlCol="0" anchor="ctr"/>
+          <a:lstStyle/>
+          <a:p>
+            <a:pPr algn="ctr"/>
+            <a:endParaRPr/>
           </a:p>
         </p:txBody>
       </p:sp>
@@ -15676,6 +18353,14 @@
 <file path=ppt/slides/slide31.xml><?xml version="1.0" encoding="utf-8"?>
 <p:sld xmlns:a="http://schemas.openxmlformats.org/drawingml/2006/main" xmlns:r="http://schemas.openxmlformats.org/officeDocument/2006/relationships" xmlns:p="http://schemas.openxmlformats.org/presentationml/2006/main">
   <p:cSld>
+    <p:bg>
+      <p:bgPr>
+        <a:solidFill>
+          <a:srgbClr val="1E2A3A"/>
+        </a:solidFill>
+        <a:effectLst/>
+      </p:bgPr>
+    </p:bg>
     <p:spTree>
       <p:nvGrpSpPr>
         <p:cNvPr id="1" name=""/>
@@ -15706,6 +18391,11 @@
           <a:lstStyle/>
           <a:p>
             <a:r>
+              <a:rPr sz="2800" b="1">
+                <a:solidFill>
+                  <a:srgbClr val="FFFFFF"/>
+                </a:solidFill>
+              </a:rPr>
               <a:t>Demo Repository Walkthrough</a:t>
             </a:r>
           </a:p>
@@ -15727,21 +18417,41 @@
           <a:lstStyle/>
           <a:p>
             <a:r>
+              <a:rPr sz="1600">
+                <a:solidFill>
+                  <a:srgbClr val="D0D8E0"/>
+                </a:solidFill>
+              </a:rPr>
               <a:t>Dockerfiles</a:t>
             </a:r>
           </a:p>
           <a:p>
             <a:r>
+              <a:rPr sz="1600">
+                <a:solidFill>
+                  <a:srgbClr val="D0D8E0"/>
+                </a:solidFill>
+              </a:rPr>
               <a:t>Scanning scripts</a:t>
             </a:r>
           </a:p>
           <a:p>
             <a:r>
+              <a:rPr sz="1600">
+                <a:solidFill>
+                  <a:srgbClr val="D0D8E0"/>
+                </a:solidFill>
+              </a:rPr>
               <a:t>Runtime examples</a:t>
             </a:r>
           </a:p>
           <a:p>
             <a:r>
+              <a:rPr sz="1600">
+                <a:solidFill>
+                  <a:srgbClr val="D0D8E0"/>
+                </a:solidFill>
+              </a:rPr>
               <a:t>Speaker notes and implementation details</a:t>
             </a:r>
           </a:p>
@@ -15777,8 +18487,59 @@
               </a:defRPr>
             </a:pPr>
             <a:r>
+              <a:rPr sz="1000" i="1">
+                <a:solidFill>
+                  <a:srgbClr val="607890"/>
+                </a:solidFill>
+              </a:rPr>
               <a:t>Additional implementation details, Dockerfiles, scripts, and speaker notes will be available in the GitHub repository.</a:t>
             </a:r>
+          </a:p>
+        </p:txBody>
+      </p:sp>
+      <p:sp>
+        <p:nvSpPr>
+          <p:cNvPr id="5" name="Rectangle 4"/>
+          <p:cNvSpPr/>
+          <p:nvPr/>
+        </p:nvSpPr>
+        <p:spPr>
+          <a:xfrm>
+            <a:off x="411480" y="1261872"/>
+            <a:ext cx="8321040" cy="40000"/>
+          </a:xfrm>
+          <a:prstGeom prst="rect">
+            <a:avLst/>
+          </a:prstGeom>
+          <a:solidFill>
+            <a:srgbClr val="00BCEB"/>
+          </a:solidFill>
+          <a:ln>
+            <a:solidFill>
+              <a:srgbClr val="1E2A3A"/>
+            </a:solidFill>
+          </a:ln>
+        </p:spPr>
+        <p:style>
+          <a:lnRef idx="1">
+            <a:schemeClr val="accent1"/>
+          </a:lnRef>
+          <a:fillRef idx="3">
+            <a:schemeClr val="accent1"/>
+          </a:fillRef>
+          <a:effectRef idx="2">
+            <a:schemeClr val="accent1"/>
+          </a:effectRef>
+          <a:fontRef idx="minor">
+            <a:schemeClr val="lt1"/>
+          </a:fontRef>
+        </p:style>
+        <p:txBody>
+          <a:bodyPr rtlCol="0" anchor="ctr"/>
+          <a:lstStyle/>
+          <a:p>
+            <a:pPr algn="ctr"/>
+            <a:endParaRPr/>
           </a:p>
         </p:txBody>
       </p:sp>
@@ -15793,6 +18554,14 @@
 <file path=ppt/slides/slide32.xml><?xml version="1.0" encoding="utf-8"?>
 <p:sld xmlns:a="http://schemas.openxmlformats.org/drawingml/2006/main" xmlns:r="http://schemas.openxmlformats.org/officeDocument/2006/relationships" xmlns:p="http://schemas.openxmlformats.org/presentationml/2006/main">
   <p:cSld>
+    <p:bg>
+      <p:bgPr>
+        <a:solidFill>
+          <a:srgbClr val="1E2A3A"/>
+        </a:solidFill>
+        <a:effectLst/>
+      </p:bgPr>
+    </p:bg>
     <p:spTree>
       <p:nvGrpSpPr>
         <p:cNvPr id="1" name=""/>
@@ -15823,6 +18592,11 @@
           <a:lstStyle/>
           <a:p>
             <a:r>
+              <a:rPr sz="2800" b="1">
+                <a:solidFill>
+                  <a:srgbClr val="FFFFFF"/>
+                </a:solidFill>
+              </a:rPr>
               <a:t>Key Takeaways</a:t>
             </a:r>
           </a:p>
@@ -15844,21 +18618,41 @@
           <a:lstStyle/>
           <a:p>
             <a:r>
+              <a:rPr sz="1600">
+                <a:solidFill>
+                  <a:srgbClr val="D0D8E0"/>
+                </a:solidFill>
+              </a:rPr>
               <a:t>Distroless reduces runtime attack surface.</a:t>
             </a:r>
           </a:p>
           <a:p>
             <a:r>
+              <a:rPr sz="1600">
+                <a:solidFill>
+                  <a:srgbClr val="D0D8E0"/>
+                </a:solidFill>
+              </a:rPr>
               <a:t>Wolfi modernizes container packaging.</a:t>
             </a:r>
           </a:p>
           <a:p>
             <a:r>
+              <a:rPr sz="1600">
+                <a:solidFill>
+                  <a:srgbClr val="D0D8E0"/>
+                </a:solidFill>
+              </a:rPr>
               <a:t>Chainguard improves supply chain visibility and operational security.</a:t>
             </a:r>
           </a:p>
           <a:p>
             <a:r>
+              <a:rPr sz="1600">
+                <a:solidFill>
+                  <a:srgbClr val="D0D8E0"/>
+                </a:solidFill>
+              </a:rPr>
               <a:t>Security is risk reduction, not magic.</a:t>
             </a:r>
           </a:p>
@@ -15894,8 +18688,59 @@
               </a:defRPr>
             </a:pPr>
             <a:r>
+              <a:rPr sz="1000" i="1">
+                <a:solidFill>
+                  <a:srgbClr val="607890"/>
+                </a:solidFill>
+              </a:rPr>
               <a:t>Additional implementation details, Dockerfiles, scripts, and speaker notes will be available in the GitHub repository.</a:t>
             </a:r>
+          </a:p>
+        </p:txBody>
+      </p:sp>
+      <p:sp>
+        <p:nvSpPr>
+          <p:cNvPr id="5" name="Rectangle 4"/>
+          <p:cNvSpPr/>
+          <p:nvPr/>
+        </p:nvSpPr>
+        <p:spPr>
+          <a:xfrm>
+            <a:off x="411480" y="1261872"/>
+            <a:ext cx="8321040" cy="40000"/>
+          </a:xfrm>
+          <a:prstGeom prst="rect">
+            <a:avLst/>
+          </a:prstGeom>
+          <a:solidFill>
+            <a:srgbClr val="00BCEB"/>
+          </a:solidFill>
+          <a:ln>
+            <a:solidFill>
+              <a:srgbClr val="1E2A3A"/>
+            </a:solidFill>
+          </a:ln>
+        </p:spPr>
+        <p:style>
+          <a:lnRef idx="1">
+            <a:schemeClr val="accent1"/>
+          </a:lnRef>
+          <a:fillRef idx="3">
+            <a:schemeClr val="accent1"/>
+          </a:fillRef>
+          <a:effectRef idx="2">
+            <a:schemeClr val="accent1"/>
+          </a:effectRef>
+          <a:fontRef idx="minor">
+            <a:schemeClr val="lt1"/>
+          </a:fontRef>
+        </p:style>
+        <p:txBody>
+          <a:bodyPr rtlCol="0" anchor="ctr"/>
+          <a:lstStyle/>
+          <a:p>
+            <a:pPr algn="ctr"/>
+            <a:endParaRPr/>
           </a:p>
         </p:txBody>
       </p:sp>
@@ -15910,6 +18755,14 @@
 <file path=ppt/slides/slide33.xml><?xml version="1.0" encoding="utf-8"?>
 <p:sld xmlns:a="http://schemas.openxmlformats.org/drawingml/2006/main" xmlns:r="http://schemas.openxmlformats.org/officeDocument/2006/relationships" xmlns:p="http://schemas.openxmlformats.org/presentationml/2006/main">
   <p:cSld>
+    <p:bg>
+      <p:bgPr>
+        <a:solidFill>
+          <a:srgbClr val="1E2A3A"/>
+        </a:solidFill>
+        <a:effectLst/>
+      </p:bgPr>
+    </p:bg>
     <p:spTree>
       <p:nvGrpSpPr>
         <p:cNvPr id="1" name=""/>
@@ -15940,6 +18793,11 @@
           <a:lstStyle/>
           <a:p>
             <a:r>
+              <a:rPr sz="2800" b="1">
+                <a:solidFill>
+                  <a:srgbClr val="FFFFFF"/>
+                </a:solidFill>
+              </a:rPr>
               <a:t>Questions</a:t>
             </a:r>
           </a:p>
@@ -15961,6 +18819,11 @@
           <a:lstStyle/>
           <a:p>
             <a:r>
+              <a:rPr sz="1600">
+                <a:solidFill>
+                  <a:srgbClr val="D0D8E0"/>
+                </a:solidFill>
+              </a:rPr>
               <a:t>GitHub repository and examples available after the talk.</a:t>
             </a:r>
           </a:p>
@@ -15996,8 +18859,59 @@
               </a:defRPr>
             </a:pPr>
             <a:r>
+              <a:rPr sz="1000" i="1">
+                <a:solidFill>
+                  <a:srgbClr val="607890"/>
+                </a:solidFill>
+              </a:rPr>
               <a:t>Additional implementation details, Dockerfiles, scripts, and speaker notes will be available in the GitHub repository.</a:t>
             </a:r>
+          </a:p>
+        </p:txBody>
+      </p:sp>
+      <p:sp>
+        <p:nvSpPr>
+          <p:cNvPr id="5" name="Rectangle 4"/>
+          <p:cNvSpPr/>
+          <p:nvPr/>
+        </p:nvSpPr>
+        <p:spPr>
+          <a:xfrm>
+            <a:off x="411480" y="1261872"/>
+            <a:ext cx="8321040" cy="40000"/>
+          </a:xfrm>
+          <a:prstGeom prst="rect">
+            <a:avLst/>
+          </a:prstGeom>
+          <a:solidFill>
+            <a:srgbClr val="00BCEB"/>
+          </a:solidFill>
+          <a:ln>
+            <a:solidFill>
+              <a:srgbClr val="1E2A3A"/>
+            </a:solidFill>
+          </a:ln>
+        </p:spPr>
+        <p:style>
+          <a:lnRef idx="1">
+            <a:schemeClr val="accent1"/>
+          </a:lnRef>
+          <a:fillRef idx="3">
+            <a:schemeClr val="accent1"/>
+          </a:fillRef>
+          <a:effectRef idx="2">
+            <a:schemeClr val="accent1"/>
+          </a:effectRef>
+          <a:fontRef idx="minor">
+            <a:schemeClr val="lt1"/>
+          </a:fontRef>
+        </p:style>
+        <p:txBody>
+          <a:bodyPr rtlCol="0" anchor="ctr"/>
+          <a:lstStyle/>
+          <a:p>
+            <a:pPr algn="ctr"/>
+            <a:endParaRPr/>
           </a:p>
         </p:txBody>
       </p:sp>
@@ -16012,6 +18926,14 @@
 <file path=ppt/slides/slide4.xml><?xml version="1.0" encoding="utf-8"?>
 <p:sld xmlns:a="http://schemas.openxmlformats.org/drawingml/2006/main" xmlns:r="http://schemas.openxmlformats.org/officeDocument/2006/relationships" xmlns:p="http://schemas.openxmlformats.org/presentationml/2006/main">
   <p:cSld>
+    <p:bg>
+      <p:bgPr>
+        <a:solidFill>
+          <a:srgbClr val="1E2A3A"/>
+        </a:solidFill>
+        <a:effectLst/>
+      </p:bgPr>
+    </p:bg>
     <p:spTree>
       <p:nvGrpSpPr>
         <p:cNvPr id="1" name=""/>
@@ -16028,6 +18950,190 @@
       </p:grpSpPr>
       <p:sp>
         <p:nvSpPr>
+          <p:cNvPr id="8" name="Rectangle 7"/>
+          <p:cNvSpPr/>
+          <p:nvPr/>
+        </p:nvSpPr>
+        <p:spPr>
+          <a:xfrm>
+            <a:off x="406400" y="4394200"/>
+            <a:ext cx="8331200" cy="355600"/>
+          </a:xfrm>
+          <a:prstGeom prst="rect">
+            <a:avLst/>
+          </a:prstGeom>
+          <a:solidFill>
+            <a:srgbClr val="0A1420"/>
+          </a:solidFill>
+          <a:ln>
+            <a:solidFill>
+              <a:srgbClr val="1E2A3A"/>
+            </a:solidFill>
+          </a:ln>
+        </p:spPr>
+        <p:style>
+          <a:lnRef idx="1">
+            <a:schemeClr val="accent1"/>
+          </a:lnRef>
+          <a:fillRef idx="3">
+            <a:schemeClr val="accent1"/>
+          </a:fillRef>
+          <a:effectRef idx="2">
+            <a:schemeClr val="accent1"/>
+          </a:effectRef>
+          <a:fontRef idx="minor">
+            <a:schemeClr val="lt1"/>
+          </a:fontRef>
+        </p:style>
+        <p:txBody>
+          <a:bodyPr rtlCol="0" anchor="ctr"/>
+          <a:lstStyle/>
+          <a:p>
+            <a:pPr algn="ctr"/>
+            <a:endParaRPr/>
+          </a:p>
+        </p:txBody>
+      </p:sp>
+      <p:sp>
+        <p:nvSpPr>
+          <p:cNvPr id="7" name="Rectangle 6"/>
+          <p:cNvSpPr/>
+          <p:nvPr/>
+        </p:nvSpPr>
+        <p:spPr>
+          <a:xfrm>
+            <a:off x="406400" y="3632200"/>
+            <a:ext cx="8331200" cy="609600"/>
+          </a:xfrm>
+          <a:prstGeom prst="rect">
+            <a:avLst/>
+          </a:prstGeom>
+          <a:solidFill>
+            <a:srgbClr val="0A1420"/>
+          </a:solidFill>
+          <a:ln>
+            <a:solidFill>
+              <a:srgbClr val="1E2A3A"/>
+            </a:solidFill>
+          </a:ln>
+        </p:spPr>
+        <p:style>
+          <a:lnRef idx="1">
+            <a:schemeClr val="accent1"/>
+          </a:lnRef>
+          <a:fillRef idx="3">
+            <a:schemeClr val="accent1"/>
+          </a:fillRef>
+          <a:effectRef idx="2">
+            <a:schemeClr val="accent1"/>
+          </a:effectRef>
+          <a:fontRef idx="minor">
+            <a:schemeClr val="lt1"/>
+          </a:fontRef>
+        </p:style>
+        <p:txBody>
+          <a:bodyPr rtlCol="0" anchor="ctr"/>
+          <a:lstStyle/>
+          <a:p>
+            <a:pPr algn="ctr"/>
+            <a:endParaRPr/>
+          </a:p>
+        </p:txBody>
+      </p:sp>
+      <p:sp>
+        <p:nvSpPr>
+          <p:cNvPr id="6" name="Rectangle 5"/>
+          <p:cNvSpPr/>
+          <p:nvPr/>
+        </p:nvSpPr>
+        <p:spPr>
+          <a:xfrm>
+            <a:off x="406400" y="2870200"/>
+            <a:ext cx="8331200" cy="609600"/>
+          </a:xfrm>
+          <a:prstGeom prst="rect">
+            <a:avLst/>
+          </a:prstGeom>
+          <a:solidFill>
+            <a:srgbClr val="0A1420"/>
+          </a:solidFill>
+          <a:ln>
+            <a:solidFill>
+              <a:srgbClr val="1E2A3A"/>
+            </a:solidFill>
+          </a:ln>
+        </p:spPr>
+        <p:style>
+          <a:lnRef idx="1">
+            <a:schemeClr val="accent1"/>
+          </a:lnRef>
+          <a:fillRef idx="3">
+            <a:schemeClr val="accent1"/>
+          </a:fillRef>
+          <a:effectRef idx="2">
+            <a:schemeClr val="accent1"/>
+          </a:effectRef>
+          <a:fontRef idx="minor">
+            <a:schemeClr val="lt1"/>
+          </a:fontRef>
+        </p:style>
+        <p:txBody>
+          <a:bodyPr rtlCol="0" anchor="ctr"/>
+          <a:lstStyle/>
+          <a:p>
+            <a:pPr algn="ctr"/>
+            <a:endParaRPr/>
+          </a:p>
+        </p:txBody>
+      </p:sp>
+      <p:sp>
+        <p:nvSpPr>
+          <p:cNvPr id="5" name="Rectangle 4"/>
+          <p:cNvSpPr/>
+          <p:nvPr/>
+        </p:nvSpPr>
+        <p:spPr>
+          <a:xfrm>
+            <a:off x="406400" y="2108200"/>
+            <a:ext cx="8331200" cy="609600"/>
+          </a:xfrm>
+          <a:prstGeom prst="rect">
+            <a:avLst/>
+          </a:prstGeom>
+          <a:solidFill>
+            <a:srgbClr val="0A1420"/>
+          </a:solidFill>
+          <a:ln>
+            <a:solidFill>
+              <a:srgbClr val="1E2A3A"/>
+            </a:solidFill>
+          </a:ln>
+        </p:spPr>
+        <p:style>
+          <a:lnRef idx="1">
+            <a:schemeClr val="accent1"/>
+          </a:lnRef>
+          <a:fillRef idx="3">
+            <a:schemeClr val="accent1"/>
+          </a:fillRef>
+          <a:effectRef idx="2">
+            <a:schemeClr val="accent1"/>
+          </a:effectRef>
+          <a:fontRef idx="minor">
+            <a:schemeClr val="lt1"/>
+          </a:fontRef>
+        </p:style>
+        <p:txBody>
+          <a:bodyPr rtlCol="0" anchor="ctr"/>
+          <a:lstStyle/>
+          <a:p>
+            <a:pPr algn="ctr"/>
+            <a:endParaRPr/>
+          </a:p>
+        </p:txBody>
+      </p:sp>
+      <p:sp>
+        <p:nvSpPr>
           <p:cNvPr id="2" name="Title 1"/>
           <p:cNvSpPr>
             <a:spLocks noGrp="1"/>
@@ -16042,7 +19148,11 @@
           <a:lstStyle/>
           <a:p>
             <a:r>
-              <a:rPr dirty="0"/>
+              <a:rPr sz="2800" b="1" dirty="0">
+                <a:solidFill>
+                  <a:srgbClr val="FFFFFF"/>
+                </a:solidFill>
+              </a:rPr>
               <a:t>Demo: Command Injection</a:t>
             </a:r>
           </a:p>
@@ -16066,83 +19176,184 @@
           <a:lstStyle/>
           <a:p>
             <a:r>
-              <a:rPr lang="en-US" b="1"/>
+              <a:rPr lang="en-US" sz="1600" b="1">
+                <a:solidFill>
+                  <a:srgbClr val="F7A800"/>
+                </a:solidFill>
+              </a:rPr>
               <a:t>01-demo-debian  (debian:12, shell present)</a:t>
             </a:r>
           </a:p>
           <a:p>
             <a:r>
-              <a:rPr lang="en-US" b="1"/>
+              <a:rPr lang="en-US" sz="1600" b="1">
+                <a:solidFill>
+                  <a:srgbClr val="F7A800"/>
+                </a:solidFill>
+              </a:rPr>
               <a:t>Build and run:</a:t>
             </a:r>
           </a:p>
           <a:p>
             <a:pPr lvl="1"/>
             <a:r>
-              <a:rPr lang="en-US" b="0"/>
+              <a:rPr lang="en-US" sz="1300" b="0">
+                <a:solidFill>
+                  <a:srgbClr val="A8D8FF"/>
+                </a:solidFill>
+                <a:latin typeface="Courier New"/>
+              </a:rPr>
               <a:t>docker build -f Dockerfile -t 01-demo-debian ..</a:t>
             </a:r>
           </a:p>
           <a:p>
             <a:pPr lvl="1"/>
             <a:r>
-              <a:rPr lang="en-US" b="0"/>
+              <a:rPr lang="en-US" sz="1300" b="0">
+                <a:solidFill>
+                  <a:srgbClr val="A8D8FF"/>
+                </a:solidFill>
+                <a:latin typeface="Courier New"/>
+              </a:rPr>
               <a:t>docker run -d --name 01-demo-debian -p 5001:5000 01-demo-debian</a:t>
             </a:r>
           </a:p>
           <a:p>
             <a:r>
-              <a:rPr lang="en-US" b="1"/>
+              <a:rPr lang="en-US" sz="1600" b="1">
+                <a:solidFill>
+                  <a:srgbClr val="F7A800"/>
+                </a:solidFill>
+              </a:rPr>
               <a:t>Normal request:</a:t>
             </a:r>
           </a:p>
           <a:p>
             <a:pPr lvl="1"/>
             <a:r>
-              <a:rPr lang="en-US" b="0"/>
+              <a:rPr lang="en-US" sz="1300" b="0">
+                <a:solidFill>
+                  <a:srgbClr val="A8D8FF"/>
+                </a:solidFill>
+                <a:latin typeface="Courier New"/>
+              </a:rPr>
               <a:t>curl "http://localhost:5001/ping?host=8.8.8.8"</a:t>
             </a:r>
           </a:p>
           <a:p>
             <a:pPr lvl="1"/>
             <a:r>
-              <a:rPr lang="en-US" b="0"/>
+              <a:rPr lang="en-US" sz="1300" b="0">
+                <a:solidFill>
+                  <a:srgbClr val="A8D8FF"/>
+                </a:solidFill>
+                <a:latin typeface="Courier New"/>
+              </a:rPr>
               <a:t>{ "returncode": 0, "stdout": "... 2 packets transmitted ..." }</a:t>
             </a:r>
           </a:p>
           <a:p>
             <a:r>
-              <a:rPr lang="en-US" b="1"/>
+              <a:rPr lang="en-US" sz="1600" b="1">
+                <a:solidFill>
+                  <a:srgbClr val="F7A800"/>
+                </a:solidFill>
+              </a:rPr>
               <a:t>Exploit:</a:t>
             </a:r>
           </a:p>
           <a:p>
             <a:pPr lvl="1"/>
             <a:r>
-              <a:rPr lang="en-US" b="0"/>
+              <a:rPr lang="en-US" sz="1300" b="0">
+                <a:solidFill>
+                  <a:srgbClr val="A8D8FF"/>
+                </a:solidFill>
+                <a:latin typeface="Courier New"/>
+              </a:rPr>
               <a:t>curl "http://localhost:5001/ping?host=8.8.8.8%3B+id"</a:t>
             </a:r>
           </a:p>
           <a:p>
             <a:pPr lvl="1"/>
             <a:r>
-              <a:rPr lang="en-US" b="0"/>
+              <a:rPr lang="en-US" sz="1300" b="0">
+                <a:solidFill>
+                  <a:srgbClr val="A8D8FF"/>
+                </a:solidFill>
+                <a:latin typeface="Courier New"/>
+              </a:rPr>
               <a:t>{ "stdout": "PING 8.8.8.8 ...\nuid=10001(appuser) gid=10001(appuser)" }</a:t>
             </a:r>
           </a:p>
           <a:p>
             <a:r>
-              <a:rPr lang="en-US" b="1"/>
+              <a:rPr lang="en-US" sz="1600" b="1">
+                <a:solidFill>
+                  <a:srgbClr val="F7A800"/>
+                </a:solidFill>
+              </a:rPr>
               <a:t>Shell access:</a:t>
             </a:r>
           </a:p>
           <a:p>
             <a:pPr lvl="1"/>
             <a:r>
-              <a:rPr lang="en-US" b="0"/>
+              <a:rPr lang="en-US" sz="1300" b="0">
+                <a:solidFill>
+                  <a:srgbClr val="A8D8FF"/>
+                </a:solidFill>
+                <a:latin typeface="Courier New"/>
+              </a:rPr>
               <a:t>docker exec -it 01-demo-debian /bin/bash</a:t>
             </a:r>
             <a:endParaRPr lang="en-US" b="0" dirty="0"/>
+          </a:p>
+        </p:txBody>
+      </p:sp>
+      <p:sp>
+        <p:nvSpPr>
+          <p:cNvPr id="4" name="Rectangle 3"/>
+          <p:cNvSpPr/>
+          <p:nvPr/>
+        </p:nvSpPr>
+        <p:spPr>
+          <a:xfrm>
+            <a:off x="411480" y="1261872"/>
+            <a:ext cx="8321040" cy="40000"/>
+          </a:xfrm>
+          <a:prstGeom prst="rect">
+            <a:avLst/>
+          </a:prstGeom>
+          <a:solidFill>
+            <a:srgbClr val="00BCEB"/>
+          </a:solidFill>
+          <a:ln>
+            <a:solidFill>
+              <a:srgbClr val="1E2A3A"/>
+            </a:solidFill>
+          </a:ln>
+        </p:spPr>
+        <p:style>
+          <a:lnRef idx="1">
+            <a:schemeClr val="accent1"/>
+          </a:lnRef>
+          <a:fillRef idx="3">
+            <a:schemeClr val="accent1"/>
+          </a:fillRef>
+          <a:effectRef idx="2">
+            <a:schemeClr val="accent1"/>
+          </a:effectRef>
+          <a:fontRef idx="minor">
+            <a:schemeClr val="lt1"/>
+          </a:fontRef>
+        </p:style>
+        <p:txBody>
+          <a:bodyPr rtlCol="0" anchor="ctr"/>
+          <a:lstStyle/>
+          <a:p>
+            <a:pPr algn="ctr"/>
+            <a:endParaRPr/>
           </a:p>
         </p:txBody>
       </p:sp>
@@ -16157,6 +19368,14 @@
 <file path=ppt/slides/slide5.xml><?xml version="1.0" encoding="utf-8"?>
 <p:sld xmlns:a="http://schemas.openxmlformats.org/drawingml/2006/main" xmlns:r="http://schemas.openxmlformats.org/officeDocument/2006/relationships" xmlns:p="http://schemas.openxmlformats.org/presentationml/2006/main">
   <p:cSld>
+    <p:bg>
+      <p:bgPr>
+        <a:solidFill>
+          <a:srgbClr val="1E2A3A"/>
+        </a:solidFill>
+        <a:effectLst/>
+      </p:bgPr>
+    </p:bg>
     <p:spTree>
       <p:nvGrpSpPr>
         <p:cNvPr id="1" name=""/>
@@ -16189,6 +19408,11 @@
           <a:lstStyle/>
           <a:p>
             <a:r>
+              <a:rPr sz="2800" b="1">
+                <a:solidFill>
+                  <a:srgbClr val="FFFFFF"/>
+                </a:solidFill>
+              </a:rPr>
               <a:t>Why Are We Shipping Entire Operating Systems?</a:t>
             </a:r>
           </a:p>
@@ -16212,19 +19436,31 @@
           <a:lstStyle/>
           <a:p>
             <a:r>
-              <a:rPr dirty="0"/>
+              <a:rPr sz="1600" dirty="0">
+                <a:solidFill>
+                  <a:srgbClr val="D0D8E0"/>
+                </a:solidFill>
+              </a:rPr>
               <a:t>Modern containers often include shells, package managers, editors, and debugging tools.</a:t>
             </a:r>
           </a:p>
           <a:p>
             <a:r>
-              <a:rPr dirty="0"/>
+              <a:rPr sz="1600" dirty="0">
+                <a:solidFill>
+                  <a:srgbClr val="D0D8E0"/>
+                </a:solidFill>
+              </a:rPr>
               <a:t>Many workloads only need an application binary and runtime.</a:t>
             </a:r>
           </a:p>
           <a:p>
             <a:r>
-              <a:rPr dirty="0"/>
+              <a:rPr sz="1600" dirty="0">
+                <a:solidFill>
+                  <a:srgbClr val="D0D8E0"/>
+                </a:solidFill>
+              </a:rPr>
               <a:t>More software means more attack surface and more CVEs.</a:t>
             </a:r>
           </a:p>
@@ -16233,28 +19469,44 @@
           </a:p>
           <a:p>
             <a:r>
-              <a:rPr b="1" dirty="0"/>
+              <a:rPr sz="1600" b="1" dirty="0">
+                <a:solidFill>
+                  <a:srgbClr val="F7A800"/>
+                </a:solidFill>
+              </a:rPr>
               <a:t>The consequences</a:t>
             </a:r>
           </a:p>
           <a:p>
             <a:pPr lvl="1"/>
             <a:r>
-              <a:rPr dirty="0"/>
+              <a:rPr sz="1600" dirty="0">
+                <a:solidFill>
+                  <a:srgbClr val="D0D8E0"/>
+                </a:solidFill>
+              </a:rPr>
               <a:t>Extra packages increase operational exposure.</a:t>
             </a:r>
           </a:p>
           <a:p>
             <a:pPr lvl="1"/>
             <a:r>
-              <a:rPr dirty="0"/>
+              <a:rPr sz="1600" dirty="0">
+                <a:solidFill>
+                  <a:srgbClr val="D0D8E0"/>
+                </a:solidFill>
+              </a:rPr>
               <a:t>Attackers benefit from built-in tooling.</a:t>
             </a:r>
           </a:p>
           <a:p>
             <a:pPr lvl="1"/>
             <a:r>
-              <a:rPr dirty="0"/>
+              <a:rPr sz="1600" dirty="0">
+                <a:solidFill>
+                  <a:srgbClr val="D0D8E0"/>
+                </a:solidFill>
+              </a:rPr>
               <a:t>Vulnerability scanners produce more noise with larger images.</a:t>
             </a:r>
           </a:p>
@@ -16290,8 +19542,59 @@
               </a:defRPr>
             </a:pPr>
             <a:r>
+              <a:rPr sz="1000" i="1">
+                <a:solidFill>
+                  <a:srgbClr val="607890"/>
+                </a:solidFill>
+              </a:rPr>
               <a:t>Additional implementation details, Dockerfiles, scripts, and speaker notes will be available in the GitHub repository.</a:t>
             </a:r>
+          </a:p>
+        </p:txBody>
+      </p:sp>
+      <p:sp>
+        <p:nvSpPr>
+          <p:cNvPr id="5" name="Rectangle 4"/>
+          <p:cNvSpPr/>
+          <p:nvPr/>
+        </p:nvSpPr>
+        <p:spPr>
+          <a:xfrm>
+            <a:off x="411480" y="1261872"/>
+            <a:ext cx="8321040" cy="40000"/>
+          </a:xfrm>
+          <a:prstGeom prst="rect">
+            <a:avLst/>
+          </a:prstGeom>
+          <a:solidFill>
+            <a:srgbClr val="00BCEB"/>
+          </a:solidFill>
+          <a:ln>
+            <a:solidFill>
+              <a:srgbClr val="1E2A3A"/>
+            </a:solidFill>
+          </a:ln>
+        </p:spPr>
+        <p:style>
+          <a:lnRef idx="1">
+            <a:schemeClr val="accent1"/>
+          </a:lnRef>
+          <a:fillRef idx="3">
+            <a:schemeClr val="accent1"/>
+          </a:fillRef>
+          <a:effectRef idx="2">
+            <a:schemeClr val="accent1"/>
+          </a:effectRef>
+          <a:fontRef idx="minor">
+            <a:schemeClr val="lt1"/>
+          </a:fontRef>
+        </p:style>
+        <p:txBody>
+          <a:bodyPr rtlCol="0" anchor="ctr"/>
+          <a:lstStyle/>
+          <a:p>
+            <a:pPr algn="ctr"/>
+            <a:endParaRPr/>
           </a:p>
         </p:txBody>
       </p:sp>
@@ -16306,6 +19609,14 @@
 <file path=ppt/slides/slide6.xml><?xml version="1.0" encoding="utf-8"?>
 <p:sld xmlns:a="http://schemas.openxmlformats.org/drawingml/2006/main" xmlns:r="http://schemas.openxmlformats.org/officeDocument/2006/relationships" xmlns:p="http://schemas.openxmlformats.org/presentationml/2006/main">
   <p:cSld>
+    <p:bg>
+      <p:bgPr>
+        <a:solidFill>
+          <a:srgbClr val="1E2A3A"/>
+        </a:solidFill>
+        <a:effectLst/>
+      </p:bgPr>
+    </p:bg>
     <p:spTree>
       <p:nvGrpSpPr>
         <p:cNvPr id="1" name=""/>
@@ -16336,6 +19647,11 @@
           <a:lstStyle/>
           <a:p>
             <a:r>
+              <a:rPr sz="2800" b="1">
+                <a:solidFill>
+                  <a:srgbClr val="FFFFFF"/>
+                </a:solidFill>
+              </a:rPr>
               <a:t>Traditional Base Image Comparison</a:t>
             </a:r>
           </a:p>
@@ -16357,55 +19673,99 @@
           <a:lstStyle/>
           <a:p>
             <a:r>
-              <a:rPr dirty="0"/>
+              <a:rPr sz="1600" dirty="0">
+                <a:solidFill>
+                  <a:srgbClr val="D0D8E0"/>
+                </a:solidFill>
+              </a:rPr>
               <a:t>Ubuntu/Debian</a:t>
             </a:r>
             <a:r>
-              <a:rPr lang="en-US" dirty="0"/>
+              <a:rPr lang="en-US" sz="1600" dirty="0">
+                <a:solidFill>
+                  <a:srgbClr val="D0D8E0"/>
+                </a:solidFill>
+              </a:rPr>
               <a:t>/UBI</a:t>
             </a:r>
             <a:r>
-              <a:rPr dirty="0"/>
+              <a:rPr sz="1600" dirty="0">
+                <a:solidFill>
+                  <a:srgbClr val="D0D8E0"/>
+                </a:solidFill>
+              </a:rPr>
               <a:t>: large, convenient, broad attack surface</a:t>
             </a:r>
           </a:p>
           <a:p>
             <a:r>
-              <a:rPr lang="en-US" dirty="0"/>
+              <a:rPr lang="en-US" sz="1600" dirty="0">
+                <a:solidFill>
+                  <a:srgbClr val="D0D8E0"/>
+                </a:solidFill>
+              </a:rPr>
               <a:t>Debian-slim/</a:t>
             </a:r>
             <a:r>
-              <a:rPr dirty="0"/>
+              <a:rPr sz="1600" dirty="0">
+                <a:solidFill>
+                  <a:srgbClr val="D0D8E0"/>
+                </a:solidFill>
+              </a:rPr>
               <a:t>UBI</a:t>
             </a:r>
             <a:r>
-              <a:rPr lang="en-US" dirty="0"/>
+              <a:rPr lang="en-US" sz="1600" dirty="0">
+                <a:solidFill>
+                  <a:srgbClr val="D0D8E0"/>
+                </a:solidFill>
+              </a:rPr>
               <a:t>-</a:t>
             </a:r>
             <a:r>
-              <a:rPr dirty="0"/>
+              <a:rPr sz="1600" dirty="0">
+                <a:solidFill>
+                  <a:srgbClr val="D0D8E0"/>
+                </a:solidFill>
+              </a:rPr>
               <a:t>Minimal: smaller but still includes tooling</a:t>
             </a:r>
           </a:p>
           <a:p>
             <a:r>
-              <a:rPr dirty="0"/>
+              <a:rPr sz="1600" dirty="0">
+                <a:solidFill>
+                  <a:srgbClr val="D0D8E0"/>
+                </a:solidFill>
+              </a:rPr>
               <a:t>Alpine: lightweight but still a full distro</a:t>
             </a:r>
           </a:p>
           <a:p>
             <a:r>
-              <a:rPr dirty="0" err="1"/>
+              <a:rPr sz="1600" dirty="0" err="1">
+                <a:solidFill>
+                  <a:srgbClr val="D0D8E0"/>
+                </a:solidFill>
+              </a:rPr>
               <a:t>Distroless</a:t>
             </a:r>
             <a:r>
-              <a:rPr dirty="0"/>
+              <a:rPr sz="1600" dirty="0">
+                <a:solidFill>
+                  <a:srgbClr val="D0D8E0"/>
+                </a:solidFill>
+              </a:rPr>
               <a:t>: runtime-focused</a:t>
             </a:r>
           </a:p>
           <a:p>
             <a:r>
-              <a:rPr dirty="0"/>
+              <a:rPr sz="1600" dirty="0">
+                <a:solidFill>
+                  <a:srgbClr val="D0D8E0"/>
+                </a:solidFill>
+              </a:rPr>
               <a:t>Scratch: nearly empty</a:t>
             </a:r>
           </a:p>
@@ -16441,8 +19801,59 @@
               </a:defRPr>
             </a:pPr>
             <a:r>
+              <a:rPr sz="1000" i="1">
+                <a:solidFill>
+                  <a:srgbClr val="607890"/>
+                </a:solidFill>
+              </a:rPr>
               <a:t>Additional implementation details, Dockerfiles, scripts, and speaker notes will be available in the GitHub repository.</a:t>
             </a:r>
+          </a:p>
+        </p:txBody>
+      </p:sp>
+      <p:sp>
+        <p:nvSpPr>
+          <p:cNvPr id="5" name="Rectangle 4"/>
+          <p:cNvSpPr/>
+          <p:nvPr/>
+        </p:nvSpPr>
+        <p:spPr>
+          <a:xfrm>
+            <a:off x="411480" y="1261872"/>
+            <a:ext cx="8321040" cy="40000"/>
+          </a:xfrm>
+          <a:prstGeom prst="rect">
+            <a:avLst/>
+          </a:prstGeom>
+          <a:solidFill>
+            <a:srgbClr val="00BCEB"/>
+          </a:solidFill>
+          <a:ln>
+            <a:solidFill>
+              <a:srgbClr val="1E2A3A"/>
+            </a:solidFill>
+          </a:ln>
+        </p:spPr>
+        <p:style>
+          <a:lnRef idx="1">
+            <a:schemeClr val="accent1"/>
+          </a:lnRef>
+          <a:fillRef idx="3">
+            <a:schemeClr val="accent1"/>
+          </a:fillRef>
+          <a:effectRef idx="2">
+            <a:schemeClr val="accent1"/>
+          </a:effectRef>
+          <a:fontRef idx="minor">
+            <a:schemeClr val="lt1"/>
+          </a:fontRef>
+        </p:style>
+        <p:txBody>
+          <a:bodyPr rtlCol="0" anchor="ctr"/>
+          <a:lstStyle/>
+          <a:p>
+            <a:pPr algn="ctr"/>
+            <a:endParaRPr/>
           </a:p>
         </p:txBody>
       </p:sp>
@@ -16457,6 +19868,14 @@
 <file path=ppt/slides/slide7.xml><?xml version="1.0" encoding="utf-8"?>
 <p:sld xmlns:a="http://schemas.openxmlformats.org/drawingml/2006/main" xmlns:r="http://schemas.openxmlformats.org/officeDocument/2006/relationships" xmlns:p="http://schemas.openxmlformats.org/presentationml/2006/main">
   <p:cSld>
+    <p:bg>
+      <p:bgPr>
+        <a:solidFill>
+          <a:srgbClr val="1E2A3A"/>
+        </a:solidFill>
+        <a:effectLst/>
+      </p:bgPr>
+    </p:bg>
     <p:spTree>
       <p:nvGrpSpPr>
         <p:cNvPr id="1" name=""/>
@@ -16487,6 +19906,11 @@
           <a:lstStyle/>
           <a:p>
             <a:r>
+              <a:rPr sz="2800" b="1">
+                <a:solidFill>
+                  <a:srgbClr val="FFFFFF"/>
+                </a:solidFill>
+              </a:rPr>
               <a:t>Demo: Enumerating Packages</a:t>
             </a:r>
           </a:p>
@@ -16522,6 +19946,11 @@
               </a:defRPr>
             </a:pPr>
             <a:r>
+              <a:rPr sz="1000" i="1">
+                <a:solidFill>
+                  <a:srgbClr val="607890"/>
+                </a:solidFill>
+              </a:rPr>
               <a:t>Additional implementation details, Dockerfiles, scripts, and speaker notes will be available in the GitHub repository.</a:t>
             </a:r>
           </a:p>
@@ -16559,19 +19988,31 @@
           </a:p>
           <a:p>
             <a:r>
-              <a:rPr lang="en-US" dirty="0"/>
+              <a:rPr lang="en-US" sz="1600" dirty="0">
+                <a:solidFill>
+                  <a:srgbClr val="D0D8E0"/>
+                </a:solidFill>
+              </a:rPr>
               <a:t>Standard images contain tooling unrelated to runtime execution.</a:t>
             </a:r>
           </a:p>
           <a:p>
             <a:r>
-              <a:rPr lang="en-US" dirty="0"/>
+              <a:rPr lang="en-US" sz="1600" dirty="0">
+                <a:solidFill>
+                  <a:srgbClr val="D0D8E0"/>
+                </a:solidFill>
+              </a:rPr>
               <a:t>Even minimal images still contain tooling unrelated to runtime execution.</a:t>
             </a:r>
           </a:p>
           <a:p>
             <a:r>
-              <a:rPr lang="en-US" dirty="0"/>
+              <a:rPr lang="en-US" sz="1600" dirty="0">
+                <a:solidFill>
+                  <a:srgbClr val="D0D8E0"/>
+                </a:solidFill>
+              </a:rPr>
               <a:t>Operational convenience often increases exposure.</a:t>
             </a:r>
           </a:p>
@@ -16600,41 +20041,41 @@
           <a:lstStyle/>
           <a:p>
             <a:r>
-              <a:rPr sz="1400" b="1" dirty="0">
-                <a:solidFill>
-                  <a:srgbClr val="222222"/>
+              <a:rPr sz="1000" b="1" i="1" dirty="0">
+                <a:solidFill>
+                  <a:srgbClr val="607890"/>
                 </a:solidFill>
               </a:rPr>
               <a:t>docker run --rm 01-demo-debian </a:t>
             </a:r>
             <a:r>
-              <a:rPr sz="1400" b="1" dirty="0" err="1">
-                <a:solidFill>
-                  <a:srgbClr val="222222"/>
+              <a:rPr sz="1000" b="1" i="1" dirty="0" err="1">
+                <a:solidFill>
+                  <a:srgbClr val="607890"/>
                 </a:solidFill>
               </a:rPr>
               <a:t>dpkg</a:t>
             </a:r>
             <a:r>
-              <a:rPr sz="1400" b="1" dirty="0">
-                <a:solidFill>
-                  <a:srgbClr val="222222"/>
+              <a:rPr sz="1000" b="1" i="1" dirty="0">
+                <a:solidFill>
+                  <a:srgbClr val="607890"/>
                 </a:solidFill>
               </a:rPr>
               <a:t> -l | </a:t>
             </a:r>
             <a:r>
-              <a:rPr sz="1400" b="1" dirty="0" err="1">
-                <a:solidFill>
-                  <a:srgbClr val="222222"/>
+              <a:rPr sz="1000" b="1" i="1" dirty="0" err="1">
+                <a:solidFill>
+                  <a:srgbClr val="607890"/>
                 </a:solidFill>
               </a:rPr>
               <a:t>wc</a:t>
             </a:r>
             <a:r>
-              <a:rPr sz="1400" b="1" dirty="0">
-                <a:solidFill>
-                  <a:srgbClr val="222222"/>
+              <a:rPr sz="1000" b="1" i="1" dirty="0">
+                <a:solidFill>
+                  <a:srgbClr val="607890"/>
                 </a:solidFill>
               </a:rPr>
               <a:t> -l</a:t>
@@ -17128,6 +20569,52 @@
           </a:prstGeom>
         </p:spPr>
       </p:pic>
+      <p:sp>
+        <p:nvSpPr>
+          <p:cNvPr id="10" name="Rectangle 9"/>
+          <p:cNvSpPr/>
+          <p:nvPr/>
+        </p:nvSpPr>
+        <p:spPr>
+          <a:xfrm>
+            <a:off x="411480" y="1261872"/>
+            <a:ext cx="8321040" cy="40000"/>
+          </a:xfrm>
+          <a:prstGeom prst="rect">
+            <a:avLst/>
+          </a:prstGeom>
+          <a:solidFill>
+            <a:srgbClr val="00BCEB"/>
+          </a:solidFill>
+          <a:ln>
+            <a:solidFill>
+              <a:srgbClr val="1E2A3A"/>
+            </a:solidFill>
+          </a:ln>
+        </p:spPr>
+        <p:style>
+          <a:lnRef idx="1">
+            <a:schemeClr val="accent1"/>
+          </a:lnRef>
+          <a:fillRef idx="3">
+            <a:schemeClr val="accent1"/>
+          </a:fillRef>
+          <a:effectRef idx="2">
+            <a:schemeClr val="accent1"/>
+          </a:effectRef>
+          <a:fontRef idx="minor">
+            <a:schemeClr val="lt1"/>
+          </a:fontRef>
+        </p:style>
+        <p:txBody>
+          <a:bodyPr rtlCol="0" anchor="ctr"/>
+          <a:lstStyle/>
+          <a:p>
+            <a:pPr algn="ctr"/>
+            <a:endParaRPr/>
+          </a:p>
+        </p:txBody>
+      </p:sp>
     </p:spTree>
   </p:cSld>
   <p:clrMapOvr>
@@ -17139,6 +20626,14 @@
 <file path=ppt/slides/slide8.xml><?xml version="1.0" encoding="utf-8"?>
 <p:sld xmlns:a="http://schemas.openxmlformats.org/drawingml/2006/main" xmlns:r="http://schemas.openxmlformats.org/officeDocument/2006/relationships" xmlns:p="http://schemas.openxmlformats.org/presentationml/2006/main">
   <p:cSld>
+    <p:bg>
+      <p:bgPr>
+        <a:solidFill>
+          <a:srgbClr val="1E2A3A"/>
+        </a:solidFill>
+        <a:effectLst/>
+      </p:bgPr>
+    </p:bg>
     <p:spTree>
       <p:nvGrpSpPr>
         <p:cNvPr id="1" name=""/>
@@ -17171,6 +20666,11 @@
           <a:lstStyle/>
           <a:p>
             <a:r>
+              <a:rPr sz="2800" b="1">
+                <a:solidFill>
+                  <a:srgbClr val="FFFFFF"/>
+                </a:solidFill>
+              </a:rPr>
               <a:t>Why Existing Linux Distributions Struggle in Containers</a:t>
             </a:r>
           </a:p>
@@ -17199,19 +20699,31 @@
           <a:lstStyle/>
           <a:p>
             <a:r>
-              <a:rPr dirty="0"/>
+              <a:rPr sz="1600" dirty="0">
+                <a:solidFill>
+                  <a:srgbClr val="D0D8E0"/>
+                </a:solidFill>
+              </a:rPr>
               <a:t>Traditional Linux distros were designed for servers and VMs.</a:t>
             </a:r>
           </a:p>
           <a:p>
             <a:r>
-              <a:rPr dirty="0"/>
+              <a:rPr sz="1600" dirty="0">
+                <a:solidFill>
+                  <a:srgbClr val="D0D8E0"/>
+                </a:solidFill>
+              </a:rPr>
               <a:t>Containers are immutable and single-purpose.</a:t>
             </a:r>
           </a:p>
           <a:p>
             <a:r>
-              <a:rPr dirty="0"/>
+              <a:rPr sz="1600" dirty="0">
+                <a:solidFill>
+                  <a:srgbClr val="D0D8E0"/>
+                </a:solidFill>
+              </a:rPr>
               <a:t>Package managers and shells are often unnecessary at runtime.</a:t>
             </a:r>
           </a:p>
@@ -17247,6 +20759,11 @@
               </a:defRPr>
             </a:pPr>
             <a:r>
+              <a:rPr sz="1000" i="1">
+                <a:solidFill>
+                  <a:srgbClr val="607890"/>
+                </a:solidFill>
+              </a:rPr>
               <a:t>Additional implementation details, Dockerfiles, scripts, and speaker notes will be available in the GitHub repository.</a:t>
             </a:r>
           </a:p>
@@ -17282,6 +20799,52 @@
           </a:prstGeom>
         </p:spPr>
       </p:pic>
+      <p:sp>
+        <p:nvSpPr>
+          <p:cNvPr id="7" name="Rectangle 6"/>
+          <p:cNvSpPr/>
+          <p:nvPr/>
+        </p:nvSpPr>
+        <p:spPr>
+          <a:xfrm>
+            <a:off x="411480" y="1261872"/>
+            <a:ext cx="8321040" cy="40000"/>
+          </a:xfrm>
+          <a:prstGeom prst="rect">
+            <a:avLst/>
+          </a:prstGeom>
+          <a:solidFill>
+            <a:srgbClr val="00BCEB"/>
+          </a:solidFill>
+          <a:ln>
+            <a:solidFill>
+              <a:srgbClr val="1E2A3A"/>
+            </a:solidFill>
+          </a:ln>
+        </p:spPr>
+        <p:style>
+          <a:lnRef idx="1">
+            <a:schemeClr val="accent1"/>
+          </a:lnRef>
+          <a:fillRef idx="3">
+            <a:schemeClr val="accent1"/>
+          </a:fillRef>
+          <a:effectRef idx="2">
+            <a:schemeClr val="accent1"/>
+          </a:effectRef>
+          <a:fontRef idx="minor">
+            <a:schemeClr val="lt1"/>
+          </a:fontRef>
+        </p:style>
+        <p:txBody>
+          <a:bodyPr rtlCol="0" anchor="ctr"/>
+          <a:lstStyle/>
+          <a:p>
+            <a:pPr algn="ctr"/>
+            <a:endParaRPr/>
+          </a:p>
+        </p:txBody>
+      </p:sp>
     </p:spTree>
   </p:cSld>
   <p:clrMapOvr>
@@ -17293,6 +20856,14 @@
 <file path=ppt/slides/slide9.xml><?xml version="1.0" encoding="utf-8"?>
 <p:sld xmlns:a="http://schemas.openxmlformats.org/drawingml/2006/main" xmlns:r="http://schemas.openxmlformats.org/officeDocument/2006/relationships" xmlns:p="http://schemas.openxmlformats.org/presentationml/2006/main">
   <p:cSld>
+    <p:bg>
+      <p:bgPr>
+        <a:solidFill>
+          <a:srgbClr val="1E2A3A"/>
+        </a:solidFill>
+        <a:effectLst/>
+      </p:bgPr>
+    </p:bg>
     <p:spTree>
       <p:nvGrpSpPr>
         <p:cNvPr id="1" name=""/>
@@ -17323,6 +20894,11 @@
           <a:lstStyle/>
           <a:p>
             <a:r>
+              <a:rPr sz="2800" b="1">
+                <a:solidFill>
+                  <a:srgbClr val="FFFFFF"/>
+                </a:solidFill>
+              </a:rPr>
               <a:t>Distroless Containers Explained</a:t>
             </a:r>
           </a:p>
@@ -17379,25 +20955,41 @@
           <a:lstStyle/>
           <a:p>
             <a:r>
-              <a:rPr dirty="0"/>
+              <a:rPr sz="1600" dirty="0">
+                <a:solidFill>
+                  <a:srgbClr val="D0D8E0"/>
+                </a:solidFill>
+              </a:rPr>
               <a:t>Runtime-only philosophy</a:t>
             </a:r>
           </a:p>
           <a:p>
             <a:r>
-              <a:rPr dirty="0"/>
+              <a:rPr sz="1600" dirty="0">
+                <a:solidFill>
+                  <a:srgbClr val="D0D8E0"/>
+                </a:solidFill>
+              </a:rPr>
               <a:t>No shell</a:t>
             </a:r>
           </a:p>
           <a:p>
             <a:r>
-              <a:rPr dirty="0"/>
+              <a:rPr sz="1600" dirty="0">
+                <a:solidFill>
+                  <a:srgbClr val="D0D8E0"/>
+                </a:solidFill>
+              </a:rPr>
               <a:t>No package manager</a:t>
             </a:r>
           </a:p>
           <a:p>
             <a:r>
-              <a:rPr dirty="0"/>
+              <a:rPr sz="1600" dirty="0">
+                <a:solidFill>
+                  <a:srgbClr val="D0D8E0"/>
+                </a:solidFill>
+              </a:rPr>
               <a:t>Reduce attacker convenience</a:t>
             </a:r>
           </a:p>
@@ -17433,8 +21025,59 @@
               </a:defRPr>
             </a:pPr>
             <a:r>
+              <a:rPr sz="1000" i="1">
+                <a:solidFill>
+                  <a:srgbClr val="607890"/>
+                </a:solidFill>
+              </a:rPr>
               <a:t>Additional implementation details, Dockerfiles, scripts, and speaker notes will be available in the GitHub repository.</a:t>
             </a:r>
+          </a:p>
+        </p:txBody>
+      </p:sp>
+      <p:sp>
+        <p:nvSpPr>
+          <p:cNvPr id="7" name="Rectangle 6"/>
+          <p:cNvSpPr/>
+          <p:nvPr/>
+        </p:nvSpPr>
+        <p:spPr>
+          <a:xfrm>
+            <a:off x="411480" y="1261872"/>
+            <a:ext cx="8321040" cy="40000"/>
+          </a:xfrm>
+          <a:prstGeom prst="rect">
+            <a:avLst/>
+          </a:prstGeom>
+          <a:solidFill>
+            <a:srgbClr val="00BCEB"/>
+          </a:solidFill>
+          <a:ln>
+            <a:solidFill>
+              <a:srgbClr val="1E2A3A"/>
+            </a:solidFill>
+          </a:ln>
+        </p:spPr>
+        <p:style>
+          <a:lnRef idx="1">
+            <a:schemeClr val="accent1"/>
+          </a:lnRef>
+          <a:fillRef idx="3">
+            <a:schemeClr val="accent1"/>
+          </a:fillRef>
+          <a:effectRef idx="2">
+            <a:schemeClr val="accent1"/>
+          </a:effectRef>
+          <a:fontRef idx="minor">
+            <a:schemeClr val="lt1"/>
+          </a:fontRef>
+        </p:style>
+        <p:txBody>
+          <a:bodyPr rtlCol="0" anchor="ctr"/>
+          <a:lstStyle/>
+          <a:p>
+            <a:pPr algn="ctr"/>
+            <a:endParaRPr/>
           </a:p>
         </p:txBody>
       </p:sp>
